--- a/output_pptx/Happy_Day.pptx
+++ b/output_pptx/Happy_Day.pptx
@@ -3122,8 +3122,8 @@
         </p:nvSpPr>
         <p:spPr>
           <a:xfrm>
-            <a:off x="594360" y="2258568"/>
-            <a:ext cx="11002975" cy="685800"/>
+            <a:off x="640080" y="2052828"/>
+            <a:ext cx="10911535" cy="731520"/>
           </a:xfrm>
           <a:prstGeom prst="rect">
             <a:avLst/>
@@ -3138,7 +3138,7 @@
           <a:p>
             <a:pPr algn="ctr"/>
             <a:r>
-              <a:rPr sz="4400" b="1" i="0">
+              <a:rPr sz="4800" b="1" i="0">
                 <a:solidFill>
                   <a:srgbClr val="FFFFFF"/>
                 </a:solidFill>
@@ -3157,8 +3157,8 @@
         </p:nvSpPr>
         <p:spPr>
           <a:xfrm>
-            <a:off x="594360" y="2980944"/>
-            <a:ext cx="11002975" cy="347472"/>
+            <a:off x="640080" y="2985516"/>
+            <a:ext cx="10911535" cy="731520"/>
           </a:xfrm>
           <a:prstGeom prst="rect">
             <a:avLst/>
@@ -3173,83 +3173,13 @@
           <a:p>
             <a:pPr algn="ctr"/>
             <a:r>
-              <a:rPr sz="2200" b="0" i="1">
-                <a:solidFill>
-                  <a:srgbClr val="8C8C8C"/>
-                </a:solidFill>
-                <a:latin typeface="Arial"/>
-              </a:rPr>
-              <a:t/>
-            </a:r>
-          </a:p>
-        </p:txBody>
-      </p:sp>
-      <p:sp>
-        <p:nvSpPr>
-          <p:cNvPr id="4" name="TextBox 3"/>
-          <p:cNvSpPr txBox="1"/>
-          <p:nvPr/>
-        </p:nvSpPr>
-        <p:spPr>
-          <a:xfrm>
-            <a:off x="594360" y="3529584"/>
-            <a:ext cx="11002975" cy="685800"/>
-          </a:xfrm>
-          <a:prstGeom prst="rect">
-            <a:avLst/>
-          </a:prstGeom>
-          <a:noFill/>
-        </p:spPr>
-        <p:txBody>
-          <a:bodyPr wrap="square">
-            <a:spAutoFit/>
-          </a:bodyPr>
-          <a:lstStyle/>
-          <a:p>
-            <a:pPr algn="ctr"/>
-            <a:r>
-              <a:rPr sz="2995" b="1" i="0">
+              <a:rPr sz="3200" b="1" i="0">
                 <a:solidFill>
                   <a:srgbClr val="FFFFFF"/>
                 </a:solidFill>
                 <a:latin typeface="Arial"/>
               </a:rPr>
               <a:t>Ó grande dia na história: a morte foi derrotada</a:t>
-            </a:r>
-          </a:p>
-        </p:txBody>
-      </p:sp>
-      <p:sp>
-        <p:nvSpPr>
-          <p:cNvPr id="5" name="TextBox 4"/>
-          <p:cNvSpPr txBox="1"/>
-          <p:nvPr/>
-        </p:nvSpPr>
-        <p:spPr>
-          <a:xfrm>
-            <a:off x="594360" y="4251960"/>
-            <a:ext cx="11002975" cy="347472"/>
-          </a:xfrm>
-          <a:prstGeom prst="rect">
-            <a:avLst/>
-          </a:prstGeom>
-          <a:noFill/>
-        </p:spPr>
-        <p:txBody>
-          <a:bodyPr wrap="square">
-            <a:spAutoFit/>
-          </a:bodyPr>
-          <a:lstStyle/>
-          <a:p>
-            <a:pPr algn="ctr"/>
-            <a:r>
-              <a:rPr sz="2200" b="0" i="1">
-                <a:solidFill>
-                  <a:srgbClr val="8C8C8C"/>
-                </a:solidFill>
-                <a:latin typeface="Arial"/>
-              </a:rPr>
-              <a:t/>
             </a:r>
           </a:p>
         </p:txBody>
@@ -3288,8 +3218,8 @@
         </p:nvSpPr>
         <p:spPr>
           <a:xfrm>
-            <a:off x="594360" y="2258568"/>
-            <a:ext cx="11002975" cy="685800"/>
+            <a:off x="640080" y="2052828"/>
+            <a:ext cx="10911535" cy="731520"/>
           </a:xfrm>
           <a:prstGeom prst="rect">
             <a:avLst/>
@@ -3304,7 +3234,7 @@
           <a:p>
             <a:pPr algn="ctr"/>
             <a:r>
-              <a:rPr sz="4400" b="1" i="0">
+              <a:rPr sz="4800" b="1" i="0">
                 <a:solidFill>
                   <a:srgbClr val="FFFFFF"/>
                 </a:solidFill>
@@ -3323,8 +3253,8 @@
         </p:nvSpPr>
         <p:spPr>
           <a:xfrm>
-            <a:off x="594360" y="2980944"/>
-            <a:ext cx="11002975" cy="347472"/>
+            <a:off x="640080" y="2985516"/>
+            <a:ext cx="10911535" cy="731520"/>
           </a:xfrm>
           <a:prstGeom prst="rect">
             <a:avLst/>
@@ -3339,83 +3269,13 @@
           <a:p>
             <a:pPr algn="ctr"/>
             <a:r>
-              <a:rPr sz="2200" b="0" i="1">
-                <a:solidFill>
-                  <a:srgbClr val="8C8C8C"/>
-                </a:solidFill>
-                <a:latin typeface="Arial"/>
-              </a:rPr>
-              <a:t/>
-            </a:r>
-          </a:p>
-        </p:txBody>
-      </p:sp>
-      <p:sp>
-        <p:nvSpPr>
-          <p:cNvPr id="4" name="TextBox 3"/>
-          <p:cNvSpPr txBox="1"/>
-          <p:nvPr/>
-        </p:nvSpPr>
-        <p:spPr>
-          <a:xfrm>
-            <a:off x="594360" y="3529584"/>
-            <a:ext cx="11002975" cy="685800"/>
-          </a:xfrm>
-          <a:prstGeom prst="rect">
-            <a:avLst/>
-          </a:prstGeom>
-          <a:noFill/>
-        </p:spPr>
-        <p:txBody>
-          <a:bodyPr wrap="square">
-            <a:spAutoFit/>
-          </a:bodyPr>
-          <a:lstStyle/>
-          <a:p>
-            <a:pPr algn="ctr"/>
-            <a:r>
-              <a:rPr sz="4400" b="1" i="0">
+              <a:rPr sz="4800" b="1" i="0">
                 <a:solidFill>
                   <a:srgbClr val="FFFFFF"/>
                 </a:solidFill>
                 <a:latin typeface="Arial"/>
               </a:rPr>
               <a:t>Ele está vivo</a:t>
-            </a:r>
-          </a:p>
-        </p:txBody>
-      </p:sp>
-      <p:sp>
-        <p:nvSpPr>
-          <p:cNvPr id="5" name="TextBox 4"/>
-          <p:cNvSpPr txBox="1"/>
-          <p:nvPr/>
-        </p:nvSpPr>
-        <p:spPr>
-          <a:xfrm>
-            <a:off x="594360" y="4251960"/>
-            <a:ext cx="11002975" cy="347472"/>
-          </a:xfrm>
-          <a:prstGeom prst="rect">
-            <a:avLst/>
-          </a:prstGeom>
-          <a:noFill/>
-        </p:spPr>
-        <p:txBody>
-          <a:bodyPr wrap="square">
-            <a:spAutoFit/>
-          </a:bodyPr>
-          <a:lstStyle/>
-          <a:p>
-            <a:pPr algn="ctr"/>
-            <a:r>
-              <a:rPr sz="2200" b="0" i="1">
-                <a:solidFill>
-                  <a:srgbClr val="8C8C8C"/>
-                </a:solidFill>
-                <a:latin typeface="Arial"/>
-              </a:rPr>
-              <a:t/>
             </a:r>
           </a:p>
         </p:txBody>
@@ -3454,8 +3314,8 @@
         </p:nvSpPr>
         <p:spPr>
           <a:xfrm>
-            <a:off x="594360" y="2258568"/>
-            <a:ext cx="11002975" cy="685800"/>
+            <a:off x="640080" y="2052828"/>
+            <a:ext cx="10911535" cy="731520"/>
           </a:xfrm>
           <a:prstGeom prst="rect">
             <a:avLst/>
@@ -3470,7 +3330,7 @@
           <a:p>
             <a:pPr algn="ctr"/>
             <a:r>
-              <a:rPr sz="4400" b="1" i="0">
+              <a:rPr sz="4800" b="1" i="0">
                 <a:solidFill>
                   <a:srgbClr val="FFFFFF"/>
                 </a:solidFill>
@@ -3489,8 +3349,8 @@
         </p:nvSpPr>
         <p:spPr>
           <a:xfrm>
-            <a:off x="594360" y="2980944"/>
-            <a:ext cx="11002975" cy="347472"/>
+            <a:off x="640080" y="2985516"/>
+            <a:ext cx="10911535" cy="731520"/>
           </a:xfrm>
           <a:prstGeom prst="rect">
             <a:avLst/>
@@ -3505,83 +3365,13 @@
           <a:p>
             <a:pPr algn="ctr"/>
             <a:r>
-              <a:rPr sz="2200" b="0" i="1">
-                <a:solidFill>
-                  <a:srgbClr val="8C8C8C"/>
-                </a:solidFill>
-                <a:latin typeface="Arial"/>
-              </a:rPr>
-              <a:t/>
-            </a:r>
-          </a:p>
-        </p:txBody>
-      </p:sp>
-      <p:sp>
-        <p:nvSpPr>
-          <p:cNvPr id="4" name="TextBox 3"/>
-          <p:cNvSpPr txBox="1"/>
-          <p:nvPr/>
-        </p:nvSpPr>
-        <p:spPr>
-          <a:xfrm>
-            <a:off x="594360" y="3529584"/>
-            <a:ext cx="11002975" cy="685800"/>
-          </a:xfrm>
-          <a:prstGeom prst="rect">
-            <a:avLst/>
-          </a:prstGeom>
-          <a:noFill/>
-        </p:spPr>
-        <p:txBody>
-          <a:bodyPr wrap="square">
-            <a:spAutoFit/>
-          </a:bodyPr>
-          <a:lstStyle/>
-          <a:p>
-            <a:pPr algn="ctr"/>
-            <a:r>
-              <a:rPr sz="4400" b="1" i="0">
+              <a:rPr sz="4800" b="1" i="0">
                 <a:solidFill>
                   <a:srgbClr val="FFFFFF"/>
                 </a:solidFill>
                 <a:latin typeface="Arial"/>
               </a:rPr>
               <a:t>Lavaste o meu pecado</a:t>
-            </a:r>
-          </a:p>
-        </p:txBody>
-      </p:sp>
-      <p:sp>
-        <p:nvSpPr>
-          <p:cNvPr id="5" name="TextBox 4"/>
-          <p:cNvSpPr txBox="1"/>
-          <p:nvPr/>
-        </p:nvSpPr>
-        <p:spPr>
-          <a:xfrm>
-            <a:off x="594360" y="4251960"/>
-            <a:ext cx="11002975" cy="347472"/>
-          </a:xfrm>
-          <a:prstGeom prst="rect">
-            <a:avLst/>
-          </a:prstGeom>
-          <a:noFill/>
-        </p:spPr>
-        <p:txBody>
-          <a:bodyPr wrap="square">
-            <a:spAutoFit/>
-          </a:bodyPr>
-          <a:lstStyle/>
-          <a:p>
-            <a:pPr algn="ctr"/>
-            <a:r>
-              <a:rPr sz="2200" b="0" i="1">
-                <a:solidFill>
-                  <a:srgbClr val="8C8C8C"/>
-                </a:solidFill>
-                <a:latin typeface="Arial"/>
-              </a:rPr>
-              <a:t/>
             </a:r>
           </a:p>
         </p:txBody>
@@ -3620,8 +3410,8 @@
         </p:nvSpPr>
         <p:spPr>
           <a:xfrm>
-            <a:off x="594360" y="2258568"/>
-            <a:ext cx="11002975" cy="685800"/>
+            <a:off x="640080" y="2052828"/>
+            <a:ext cx="10911535" cy="731520"/>
           </a:xfrm>
           <a:prstGeom prst="rect">
             <a:avLst/>
@@ -3636,7 +3426,7 @@
           <a:p>
             <a:pPr algn="ctr"/>
             <a:r>
-              <a:rPr sz="4400" b="1" i="0">
+              <a:rPr sz="4800" b="1" i="0">
                 <a:solidFill>
                   <a:srgbClr val="FFFFFF"/>
                 </a:solidFill>
@@ -3655,8 +3445,8 @@
         </p:nvSpPr>
         <p:spPr>
           <a:xfrm>
-            <a:off x="594360" y="2980944"/>
-            <a:ext cx="11002975" cy="347472"/>
+            <a:off x="640080" y="2985516"/>
+            <a:ext cx="10911535" cy="731520"/>
           </a:xfrm>
           <a:prstGeom prst="rect">
             <a:avLst/>
@@ -3671,83 +3461,13 @@
           <a:p>
             <a:pPr algn="ctr"/>
             <a:r>
-              <a:rPr sz="2200" b="0" i="1">
-                <a:solidFill>
-                  <a:srgbClr val="8C8C8C"/>
-                </a:solidFill>
-                <a:latin typeface="Arial"/>
-              </a:rPr>
-              <a:t/>
-            </a:r>
-          </a:p>
-        </p:txBody>
-      </p:sp>
-      <p:sp>
-        <p:nvSpPr>
-          <p:cNvPr id="4" name="TextBox 3"/>
-          <p:cNvSpPr txBox="1"/>
-          <p:nvPr/>
-        </p:nvSpPr>
-        <p:spPr>
-          <a:xfrm>
-            <a:off x="594360" y="3529584"/>
-            <a:ext cx="11002975" cy="685800"/>
-          </a:xfrm>
-          <a:prstGeom prst="rect">
-            <a:avLst/>
-          </a:prstGeom>
-          <a:noFill/>
-        </p:spPr>
-        <p:txBody>
-          <a:bodyPr wrap="square">
-            <a:spAutoFit/>
-          </a:bodyPr>
-          <a:lstStyle/>
-          <a:p>
-            <a:pPr algn="ctr"/>
-            <a:r>
-              <a:rPr sz="4400" b="1" i="0">
+              <a:rPr sz="4800" b="1" i="0">
                 <a:solidFill>
                   <a:srgbClr val="FFFFFF"/>
                 </a:solidFill>
                 <a:latin typeface="Arial"/>
               </a:rPr>
               <a:t>Para sempre sou mudado</a:t>
-            </a:r>
-          </a:p>
-        </p:txBody>
-      </p:sp>
-      <p:sp>
-        <p:nvSpPr>
-          <p:cNvPr id="5" name="TextBox 4"/>
-          <p:cNvSpPr txBox="1"/>
-          <p:nvPr/>
-        </p:nvSpPr>
-        <p:spPr>
-          <a:xfrm>
-            <a:off x="594360" y="4251960"/>
-            <a:ext cx="11002975" cy="347472"/>
-          </a:xfrm>
-          <a:prstGeom prst="rect">
-            <a:avLst/>
-          </a:prstGeom>
-          <a:noFill/>
-        </p:spPr>
-        <p:txBody>
-          <a:bodyPr wrap="square">
-            <a:spAutoFit/>
-          </a:bodyPr>
-          <a:lstStyle/>
-          <a:p>
-            <a:pPr algn="ctr"/>
-            <a:r>
-              <a:rPr sz="2200" b="0" i="1">
-                <a:solidFill>
-                  <a:srgbClr val="8C8C8C"/>
-                </a:solidFill>
-                <a:latin typeface="Arial"/>
-              </a:rPr>
-              <a:t/>
             </a:r>
           </a:p>
         </p:txBody>
@@ -3786,8 +3506,8 @@
         </p:nvSpPr>
         <p:spPr>
           <a:xfrm>
-            <a:off x="594360" y="2894076"/>
-            <a:ext cx="11002975" cy="685800"/>
+            <a:off x="640080" y="2702052"/>
+            <a:ext cx="10911535" cy="731520"/>
           </a:xfrm>
           <a:prstGeom prst="rect">
             <a:avLst/>
@@ -3802,48 +3522,13 @@
           <a:p>
             <a:pPr algn="ctr"/>
             <a:r>
-              <a:rPr sz="4400" b="1" i="0">
+              <a:rPr sz="4800" b="1" i="0">
                 <a:solidFill>
                   <a:srgbClr val="FFFFFF"/>
                 </a:solidFill>
                 <a:latin typeface="Arial"/>
               </a:rPr>
               <a:t>Quando eu estiver naquele lugar</a:t>
-            </a:r>
-          </a:p>
-        </p:txBody>
-      </p:sp>
-      <p:sp>
-        <p:nvSpPr>
-          <p:cNvPr id="3" name="TextBox 2"/>
-          <p:cNvSpPr txBox="1"/>
-          <p:nvPr/>
-        </p:nvSpPr>
-        <p:spPr>
-          <a:xfrm>
-            <a:off x="594360" y="3616452"/>
-            <a:ext cx="11002975" cy="347472"/>
-          </a:xfrm>
-          <a:prstGeom prst="rect">
-            <a:avLst/>
-          </a:prstGeom>
-          <a:noFill/>
-        </p:spPr>
-        <p:txBody>
-          <a:bodyPr wrap="square">
-            <a:spAutoFit/>
-          </a:bodyPr>
-          <a:lstStyle/>
-          <a:p>
-            <a:pPr algn="ctr"/>
-            <a:r>
-              <a:rPr sz="2200" b="0" i="1">
-                <a:solidFill>
-                  <a:srgbClr val="8C8C8C"/>
-                </a:solidFill>
-                <a:latin typeface="Arial"/>
-              </a:rPr>
-              <a:t/>
             </a:r>
           </a:p>
         </p:txBody>
@@ -3882,8 +3567,8 @@
         </p:nvSpPr>
         <p:spPr>
           <a:xfrm>
-            <a:off x="594360" y="2258568"/>
-            <a:ext cx="11002975" cy="685800"/>
+            <a:off x="640080" y="2052828"/>
+            <a:ext cx="10911535" cy="731520"/>
           </a:xfrm>
           <a:prstGeom prst="rect">
             <a:avLst/>
@@ -3898,7 +3583,7 @@
           <a:p>
             <a:pPr algn="ctr"/>
             <a:r>
-              <a:rPr sz="4141" b="1" i="0">
+              <a:rPr sz="4500" b="1" i="0">
                 <a:solidFill>
                   <a:srgbClr val="FFFFFF"/>
                 </a:solidFill>
@@ -3917,8 +3602,8 @@
         </p:nvSpPr>
         <p:spPr>
           <a:xfrm>
-            <a:off x="594360" y="2980944"/>
-            <a:ext cx="11002975" cy="347472"/>
+            <a:off x="640080" y="2985516"/>
+            <a:ext cx="10911535" cy="731520"/>
           </a:xfrm>
           <a:prstGeom prst="rect">
             <a:avLst/>
@@ -3933,83 +3618,13 @@
           <a:p>
             <a:pPr algn="ctr"/>
             <a:r>
-              <a:rPr sz="2200" b="0" i="1">
-                <a:solidFill>
-                  <a:srgbClr val="8C8C8C"/>
-                </a:solidFill>
-                <a:latin typeface="Arial"/>
-              </a:rPr>
-              <a:t/>
-            </a:r>
-          </a:p>
-        </p:txBody>
-      </p:sp>
-      <p:sp>
-        <p:nvSpPr>
-          <p:cNvPr id="4" name="TextBox 3"/>
-          <p:cNvSpPr txBox="1"/>
-          <p:nvPr/>
-        </p:nvSpPr>
-        <p:spPr>
-          <a:xfrm>
-            <a:off x="594360" y="3529584"/>
-            <a:ext cx="11002975" cy="685800"/>
-          </a:xfrm>
-          <a:prstGeom prst="rect">
-            <a:avLst/>
-          </a:prstGeom>
-          <a:noFill/>
-        </p:spPr>
-        <p:txBody>
-          <a:bodyPr wrap="square">
-            <a:spAutoFit/>
-          </a:bodyPr>
-          <a:lstStyle/>
-          <a:p>
-            <a:pPr algn="ctr"/>
-            <a:r>
-              <a:rPr sz="4400" b="1" i="0">
+              <a:rPr sz="4800" b="1" i="0">
                 <a:solidFill>
                   <a:srgbClr val="FFFFFF"/>
                 </a:solidFill>
                 <a:latin typeface="Arial"/>
               </a:rPr>
               <a:t>Serei Teu, Jesus, Tu serás meu</a:t>
-            </a:r>
-          </a:p>
-        </p:txBody>
-      </p:sp>
-      <p:sp>
-        <p:nvSpPr>
-          <p:cNvPr id="5" name="TextBox 4"/>
-          <p:cNvSpPr txBox="1"/>
-          <p:nvPr/>
-        </p:nvSpPr>
-        <p:spPr>
-          <a:xfrm>
-            <a:off x="594360" y="4251960"/>
-            <a:ext cx="11002975" cy="347472"/>
-          </a:xfrm>
-          <a:prstGeom prst="rect">
-            <a:avLst/>
-          </a:prstGeom>
-          <a:noFill/>
-        </p:spPr>
-        <p:txBody>
-          <a:bodyPr wrap="square">
-            <a:spAutoFit/>
-          </a:bodyPr>
-          <a:lstStyle/>
-          <a:p>
-            <a:pPr algn="ctr"/>
-            <a:r>
-              <a:rPr sz="2200" b="0" i="1">
-                <a:solidFill>
-                  <a:srgbClr val="8C8C8C"/>
-                </a:solidFill>
-                <a:latin typeface="Arial"/>
-              </a:rPr>
-              <a:t/>
             </a:r>
           </a:p>
         </p:txBody>
@@ -4048,8 +3663,8 @@
         </p:nvSpPr>
         <p:spPr>
           <a:xfrm>
-            <a:off x="594360" y="2258568"/>
-            <a:ext cx="11002975" cy="685800"/>
+            <a:off x="640080" y="2052828"/>
+            <a:ext cx="10911535" cy="731520"/>
           </a:xfrm>
           <a:prstGeom prst="rect">
             <a:avLst/>
@@ -4064,7 +3679,7 @@
           <a:p>
             <a:pPr algn="ctr"/>
             <a:r>
-              <a:rPr sz="4400" b="1" i="0">
+              <a:rPr sz="4800" b="1" i="0">
                 <a:solidFill>
                   <a:srgbClr val="FFFFFF"/>
                 </a:solidFill>
@@ -4083,8 +3698,8 @@
         </p:nvSpPr>
         <p:spPr>
           <a:xfrm>
-            <a:off x="594360" y="2980944"/>
-            <a:ext cx="11002975" cy="347472"/>
+            <a:off x="640080" y="2985516"/>
+            <a:ext cx="10911535" cy="731520"/>
           </a:xfrm>
           <a:prstGeom prst="rect">
             <a:avLst/>
@@ -4099,83 +3714,13 @@
           <a:p>
             <a:pPr algn="ctr"/>
             <a:r>
-              <a:rPr sz="2200" b="0" i="1">
-                <a:solidFill>
-                  <a:srgbClr val="8C8C8C"/>
-                </a:solidFill>
-                <a:latin typeface="Arial"/>
-              </a:rPr>
-              <a:t/>
-            </a:r>
-          </a:p>
-        </p:txBody>
-      </p:sp>
-      <p:sp>
-        <p:nvSpPr>
-          <p:cNvPr id="4" name="TextBox 3"/>
-          <p:cNvSpPr txBox="1"/>
-          <p:nvPr/>
-        </p:nvSpPr>
-        <p:spPr>
-          <a:xfrm>
-            <a:off x="594360" y="3529584"/>
-            <a:ext cx="11002975" cy="685800"/>
-          </a:xfrm>
-          <a:prstGeom prst="rect">
-            <a:avLst/>
-          </a:prstGeom>
-          <a:noFill/>
-        </p:spPr>
-        <p:txBody>
-          <a:bodyPr wrap="square">
-            <a:spAutoFit/>
-          </a:bodyPr>
-          <a:lstStyle/>
-          <a:p>
-            <a:pPr algn="ctr"/>
-            <a:r>
-              <a:rPr sz="4022" b="1" i="0">
+              <a:rPr sz="4300" b="1" i="0">
                 <a:solidFill>
                   <a:srgbClr val="FFFFFF"/>
                 </a:solidFill>
                 <a:latin typeface="Arial"/>
               </a:rPr>
               <a:t>Toda dor terrena finalmente cessará</a:t>
-            </a:r>
-          </a:p>
-        </p:txBody>
-      </p:sp>
-      <p:sp>
-        <p:nvSpPr>
-          <p:cNvPr id="5" name="TextBox 4"/>
-          <p:cNvSpPr txBox="1"/>
-          <p:nvPr/>
-        </p:nvSpPr>
-        <p:spPr>
-          <a:xfrm>
-            <a:off x="594360" y="4251960"/>
-            <a:ext cx="11002975" cy="347472"/>
-          </a:xfrm>
-          <a:prstGeom prst="rect">
-            <a:avLst/>
-          </a:prstGeom>
-          <a:noFill/>
-        </p:spPr>
-        <p:txBody>
-          <a:bodyPr wrap="square">
-            <a:spAutoFit/>
-          </a:bodyPr>
-          <a:lstStyle/>
-          <a:p>
-            <a:pPr algn="ctr"/>
-            <a:r>
-              <a:rPr sz="2200" b="0" i="1">
-                <a:solidFill>
-                  <a:srgbClr val="8C8C8C"/>
-                </a:solidFill>
-                <a:latin typeface="Arial"/>
-              </a:rPr>
-              <a:t/>
             </a:r>
           </a:p>
         </p:txBody>
@@ -4214,8 +3759,8 @@
         </p:nvSpPr>
         <p:spPr>
           <a:xfrm>
-            <a:off x="594360" y="2894076"/>
-            <a:ext cx="11002975" cy="685800"/>
+            <a:off x="640080" y="2702052"/>
+            <a:ext cx="10911535" cy="731520"/>
           </a:xfrm>
           <a:prstGeom prst="rect">
             <a:avLst/>
@@ -4230,48 +3775,13 @@
           <a:p>
             <a:pPr algn="ctr"/>
             <a:r>
-              <a:rPr sz="4400" b="1" i="0">
+              <a:rPr sz="4800" b="1" i="0">
                 <a:solidFill>
                   <a:srgbClr val="FFFFFF"/>
                 </a:solidFill>
                 <a:latin typeface="Arial"/>
               </a:rPr>
               <a:t>Clame: Jesus está vivo</a:t>
-            </a:r>
-          </a:p>
-        </p:txBody>
-      </p:sp>
-      <p:sp>
-        <p:nvSpPr>
-          <p:cNvPr id="3" name="TextBox 2"/>
-          <p:cNvSpPr txBox="1"/>
-          <p:nvPr/>
-        </p:nvSpPr>
-        <p:spPr>
-          <a:xfrm>
-            <a:off x="594360" y="3616452"/>
-            <a:ext cx="11002975" cy="347472"/>
-          </a:xfrm>
-          <a:prstGeom prst="rect">
-            <a:avLst/>
-          </a:prstGeom>
-          <a:noFill/>
-        </p:spPr>
-        <p:txBody>
-          <a:bodyPr wrap="square">
-            <a:spAutoFit/>
-          </a:bodyPr>
-          <a:lstStyle/>
-          <a:p>
-            <a:pPr algn="ctr"/>
-            <a:r>
-              <a:rPr sz="2200" b="0" i="1">
-                <a:solidFill>
-                  <a:srgbClr val="8C8C8C"/>
-                </a:solidFill>
-                <a:latin typeface="Arial"/>
-              </a:rPr>
-              <a:t/>
             </a:r>
           </a:p>
         </p:txBody>
@@ -4310,8 +3820,8 @@
         </p:nvSpPr>
         <p:spPr>
           <a:xfrm>
-            <a:off x="594360" y="2258568"/>
-            <a:ext cx="11002975" cy="685800"/>
+            <a:off x="640080" y="2052828"/>
+            <a:ext cx="10911535" cy="731520"/>
           </a:xfrm>
           <a:prstGeom prst="rect">
             <a:avLst/>
@@ -4326,7 +3836,7 @@
           <a:p>
             <a:pPr algn="ctr"/>
             <a:r>
-              <a:rPr sz="4400" b="1" i="0">
+              <a:rPr sz="4800" b="1" i="0">
                 <a:solidFill>
                   <a:srgbClr val="FFFFFF"/>
                 </a:solidFill>
@@ -4345,8 +3855,8 @@
         </p:nvSpPr>
         <p:spPr>
           <a:xfrm>
-            <a:off x="594360" y="2980944"/>
-            <a:ext cx="11002975" cy="347472"/>
+            <a:off x="640080" y="2985516"/>
+            <a:ext cx="10911535" cy="731520"/>
           </a:xfrm>
           <a:prstGeom prst="rect">
             <a:avLst/>
@@ -4361,83 +3871,13 @@
           <a:p>
             <a:pPr algn="ctr"/>
             <a:r>
-              <a:rPr sz="2200" b="0" i="1">
-                <a:solidFill>
-                  <a:srgbClr val="8C8C8C"/>
-                </a:solidFill>
-                <a:latin typeface="Arial"/>
-              </a:rPr>
-              <a:t/>
-            </a:r>
-          </a:p>
-        </p:txBody>
-      </p:sp>
-      <p:sp>
-        <p:nvSpPr>
-          <p:cNvPr id="4" name="TextBox 3"/>
-          <p:cNvSpPr txBox="1"/>
-          <p:nvPr/>
-        </p:nvSpPr>
-        <p:spPr>
-          <a:xfrm>
-            <a:off x="594360" y="3529584"/>
-            <a:ext cx="11002975" cy="685800"/>
-          </a:xfrm>
-          <a:prstGeom prst="rect">
-            <a:avLst/>
-          </a:prstGeom>
-          <a:noFill/>
-        </p:spPr>
-        <p:txBody>
-          <a:bodyPr wrap="square">
-            <a:spAutoFit/>
-          </a:bodyPr>
-          <a:lstStyle/>
-          <a:p>
-            <a:pPr algn="ctr"/>
-            <a:r>
-              <a:rPr sz="4400" b="1" i="0">
+              <a:rPr sz="4800" b="1" i="0">
                 <a:solidFill>
                   <a:srgbClr val="FFFFFF"/>
                 </a:solidFill>
                 <a:latin typeface="Arial"/>
               </a:rPr>
               <a:t>Ó que dia glorioso</a:t>
-            </a:r>
-          </a:p>
-        </p:txBody>
-      </p:sp>
-      <p:sp>
-        <p:nvSpPr>
-          <p:cNvPr id="5" name="TextBox 4"/>
-          <p:cNvSpPr txBox="1"/>
-          <p:nvPr/>
-        </p:nvSpPr>
-        <p:spPr>
-          <a:xfrm>
-            <a:off x="594360" y="4251960"/>
-            <a:ext cx="11002975" cy="347472"/>
-          </a:xfrm>
-          <a:prstGeom prst="rect">
-            <a:avLst/>
-          </a:prstGeom>
-          <a:noFill/>
-        </p:spPr>
-        <p:txBody>
-          <a:bodyPr wrap="square">
-            <a:spAutoFit/>
-          </a:bodyPr>
-          <a:lstStyle/>
-          <a:p>
-            <a:pPr algn="ctr"/>
-            <a:r>
-              <a:rPr sz="2200" b="0" i="1">
-                <a:solidFill>
-                  <a:srgbClr val="8C8C8C"/>
-                </a:solidFill>
-                <a:latin typeface="Arial"/>
-              </a:rPr>
-              <a:t/>
             </a:r>
           </a:p>
         </p:txBody>
@@ -4476,8 +3916,8 @@
         </p:nvSpPr>
         <p:spPr>
           <a:xfrm>
-            <a:off x="594360" y="2258568"/>
-            <a:ext cx="11002975" cy="685800"/>
+            <a:off x="640080" y="2052828"/>
+            <a:ext cx="10911535" cy="731520"/>
           </a:xfrm>
           <a:prstGeom prst="rect">
             <a:avLst/>
@@ -4492,7 +3932,7 @@
           <a:p>
             <a:pPr algn="ctr"/>
             <a:r>
-              <a:rPr sz="4400" b="1" i="0">
+              <a:rPr sz="4800" b="1" i="0">
                 <a:solidFill>
                   <a:srgbClr val="FFFFFF"/>
                 </a:solidFill>
@@ -4511,8 +3951,8 @@
         </p:nvSpPr>
         <p:spPr>
           <a:xfrm>
-            <a:off x="594360" y="2980944"/>
-            <a:ext cx="11002975" cy="347472"/>
+            <a:off x="640080" y="2985516"/>
+            <a:ext cx="10911535" cy="731520"/>
           </a:xfrm>
           <a:prstGeom prst="rect">
             <a:avLst/>
@@ -4527,83 +3967,13 @@
           <a:p>
             <a:pPr algn="ctr"/>
             <a:r>
-              <a:rPr sz="2200" b="0" i="1">
-                <a:solidFill>
-                  <a:srgbClr val="8C8C8C"/>
-                </a:solidFill>
-                <a:latin typeface="Arial"/>
-              </a:rPr>
-              <a:t/>
-            </a:r>
-          </a:p>
-        </p:txBody>
-      </p:sp>
-      <p:sp>
-        <p:nvSpPr>
-          <p:cNvPr id="4" name="TextBox 3"/>
-          <p:cNvSpPr txBox="1"/>
-          <p:nvPr/>
-        </p:nvSpPr>
-        <p:spPr>
-          <a:xfrm>
-            <a:off x="594360" y="3529584"/>
-            <a:ext cx="11002975" cy="685800"/>
-          </a:xfrm>
-          <a:prstGeom prst="rect">
-            <a:avLst/>
-          </a:prstGeom>
-          <a:noFill/>
-        </p:spPr>
-        <p:txBody>
-          <a:bodyPr wrap="square">
-            <a:spAutoFit/>
-          </a:bodyPr>
-          <a:lstStyle/>
-          <a:p>
-            <a:pPr algn="ctr"/>
-            <a:r>
-              <a:rPr sz="4400" b="1" i="0">
+              <a:rPr sz="4800" b="1" i="0">
                 <a:solidFill>
                   <a:srgbClr val="FFFFFF"/>
                 </a:solidFill>
                 <a:latin typeface="Arial"/>
               </a:rPr>
               <a:t>Como Tu me salvaste</a:t>
-            </a:r>
-          </a:p>
-        </p:txBody>
-      </p:sp>
-      <p:sp>
-        <p:nvSpPr>
-          <p:cNvPr id="5" name="TextBox 4"/>
-          <p:cNvSpPr txBox="1"/>
-          <p:nvPr/>
-        </p:nvSpPr>
-        <p:spPr>
-          <a:xfrm>
-            <a:off x="594360" y="4251960"/>
-            <a:ext cx="11002975" cy="347472"/>
-          </a:xfrm>
-          <a:prstGeom prst="rect">
-            <a:avLst/>
-          </a:prstGeom>
-          <a:noFill/>
-        </p:spPr>
-        <p:txBody>
-          <a:bodyPr wrap="square">
-            <a:spAutoFit/>
-          </a:bodyPr>
-          <a:lstStyle/>
-          <a:p>
-            <a:pPr algn="ctr"/>
-            <a:r>
-              <a:rPr sz="2200" b="0" i="1">
-                <a:solidFill>
-                  <a:srgbClr val="8C8C8C"/>
-                </a:solidFill>
-                <a:latin typeface="Arial"/>
-              </a:rPr>
-              <a:t/>
             </a:r>
           </a:p>
         </p:txBody>
@@ -4642,8 +4012,8 @@
         </p:nvSpPr>
         <p:spPr>
           <a:xfrm>
-            <a:off x="594360" y="2258568"/>
-            <a:ext cx="11002975" cy="685800"/>
+            <a:off x="640080" y="2052828"/>
+            <a:ext cx="10911535" cy="731520"/>
           </a:xfrm>
           <a:prstGeom prst="rect">
             <a:avLst/>
@@ -4658,7 +4028,7 @@
           <a:p>
             <a:pPr algn="ctr"/>
             <a:r>
-              <a:rPr sz="4400" b="1" i="0">
+              <a:rPr sz="4800" b="1" i="0">
                 <a:solidFill>
                   <a:srgbClr val="FFFFFF"/>
                 </a:solidFill>
@@ -4677,8 +4047,8 @@
         </p:nvSpPr>
         <p:spPr>
           <a:xfrm>
-            <a:off x="594360" y="2980944"/>
-            <a:ext cx="11002975" cy="347472"/>
+            <a:off x="640080" y="2985516"/>
+            <a:ext cx="10911535" cy="731520"/>
           </a:xfrm>
           <a:prstGeom prst="rect">
             <a:avLst/>
@@ -4693,83 +4063,13 @@
           <a:p>
             <a:pPr algn="ctr"/>
             <a:r>
-              <a:rPr sz="2200" b="0" i="1">
-                <a:solidFill>
-                  <a:srgbClr val="8C8C8C"/>
-                </a:solidFill>
-                <a:latin typeface="Arial"/>
-              </a:rPr>
-              <a:t/>
-            </a:r>
-          </a:p>
-        </p:txBody>
-      </p:sp>
-      <p:sp>
-        <p:nvSpPr>
-          <p:cNvPr id="4" name="TextBox 3"/>
-          <p:cNvSpPr txBox="1"/>
-          <p:nvPr/>
-        </p:nvSpPr>
-        <p:spPr>
-          <a:xfrm>
-            <a:off x="594360" y="3529584"/>
-            <a:ext cx="11002975" cy="685800"/>
-          </a:xfrm>
-          <a:prstGeom prst="rect">
-            <a:avLst/>
-          </a:prstGeom>
-          <a:noFill/>
-        </p:spPr>
-        <p:txBody>
-          <a:bodyPr wrap="square">
-            <a:spAutoFit/>
-          </a:bodyPr>
-          <a:lstStyle/>
-          <a:p>
-            <a:pPr algn="ctr"/>
-            <a:r>
-              <a:rPr sz="4400" b="1" i="0">
+              <a:rPr sz="4800" b="1" i="0">
                 <a:solidFill>
                   <a:srgbClr val="FFFFFF"/>
                 </a:solidFill>
                 <a:latin typeface="Arial"/>
               </a:rPr>
               <a:t>Que nome glorioso</a:t>
-            </a:r>
-          </a:p>
-        </p:txBody>
-      </p:sp>
-      <p:sp>
-        <p:nvSpPr>
-          <p:cNvPr id="5" name="TextBox 4"/>
-          <p:cNvSpPr txBox="1"/>
-          <p:nvPr/>
-        </p:nvSpPr>
-        <p:spPr>
-          <a:xfrm>
-            <a:off x="594360" y="4251960"/>
-            <a:ext cx="11002975" cy="347472"/>
-          </a:xfrm>
-          <a:prstGeom prst="rect">
-            <a:avLst/>
-          </a:prstGeom>
-          <a:noFill/>
-        </p:spPr>
-        <p:txBody>
-          <a:bodyPr wrap="square">
-            <a:spAutoFit/>
-          </a:bodyPr>
-          <a:lstStyle/>
-          <a:p>
-            <a:pPr algn="ctr"/>
-            <a:r>
-              <a:rPr sz="2200" b="0" i="1">
-                <a:solidFill>
-                  <a:srgbClr val="8C8C8C"/>
-                </a:solidFill>
-                <a:latin typeface="Arial"/>
-              </a:rPr>
-              <a:t/>
             </a:r>
           </a:p>
         </p:txBody>
@@ -4808,8 +4108,8 @@
         </p:nvSpPr>
         <p:spPr>
           <a:xfrm>
-            <a:off x="594360" y="2258568"/>
-            <a:ext cx="11002975" cy="685800"/>
+            <a:off x="640080" y="2052828"/>
+            <a:ext cx="10911535" cy="731520"/>
           </a:xfrm>
           <a:prstGeom prst="rect">
             <a:avLst/>
@@ -4824,7 +4124,7 @@
           <a:p>
             <a:pPr algn="ctr"/>
             <a:r>
-              <a:rPr sz="4400" b="1" i="0">
+              <a:rPr sz="4800" b="1" i="0">
                 <a:solidFill>
                   <a:srgbClr val="FFFFFF"/>
                 </a:solidFill>
@@ -4843,8 +4143,8 @@
         </p:nvSpPr>
         <p:spPr>
           <a:xfrm>
-            <a:off x="594360" y="2980944"/>
-            <a:ext cx="11002975" cy="347472"/>
+            <a:off x="640080" y="2985516"/>
+            <a:ext cx="10911535" cy="731520"/>
           </a:xfrm>
           <a:prstGeom prst="rect">
             <a:avLst/>
@@ -4859,83 +4159,13 @@
           <a:p>
             <a:pPr algn="ctr"/>
             <a:r>
-              <a:rPr sz="2200" b="0" i="1">
-                <a:solidFill>
-                  <a:srgbClr val="8C8C8C"/>
-                </a:solidFill>
-                <a:latin typeface="Arial"/>
-              </a:rPr>
-              <a:t/>
-            </a:r>
-          </a:p>
-        </p:txBody>
-      </p:sp>
-      <p:sp>
-        <p:nvSpPr>
-          <p:cNvPr id="4" name="TextBox 3"/>
-          <p:cNvSpPr txBox="1"/>
-          <p:nvPr/>
-        </p:nvSpPr>
-        <p:spPr>
-          <a:xfrm>
-            <a:off x="594360" y="3529584"/>
-            <a:ext cx="11002975" cy="685800"/>
-          </a:xfrm>
-          <a:prstGeom prst="rect">
-            <a:avLst/>
-          </a:prstGeom>
-          <a:noFill/>
-        </p:spPr>
-        <p:txBody>
-          <a:bodyPr wrap="square">
-            <a:spAutoFit/>
-          </a:bodyPr>
-          <a:lstStyle/>
-          <a:p>
-            <a:pPr algn="ctr"/>
-            <a:r>
-              <a:rPr sz="4400" b="1" i="0">
+              <a:rPr sz="4800" b="1" i="0">
                 <a:solidFill>
                   <a:srgbClr val="FFFFFF"/>
                 </a:solidFill>
                 <a:latin typeface="Arial"/>
               </a:rPr>
               <a:t>Cante: Jesus está vivo</a:t>
-            </a:r>
-          </a:p>
-        </p:txBody>
-      </p:sp>
-      <p:sp>
-        <p:nvSpPr>
-          <p:cNvPr id="5" name="TextBox 4"/>
-          <p:cNvSpPr txBox="1"/>
-          <p:nvPr/>
-        </p:nvSpPr>
-        <p:spPr>
-          <a:xfrm>
-            <a:off x="594360" y="4251960"/>
-            <a:ext cx="11002975" cy="347472"/>
-          </a:xfrm>
-          <a:prstGeom prst="rect">
-            <a:avLst/>
-          </a:prstGeom>
-          <a:noFill/>
-        </p:spPr>
-        <p:txBody>
-          <a:bodyPr wrap="square">
-            <a:spAutoFit/>
-          </a:bodyPr>
-          <a:lstStyle/>
-          <a:p>
-            <a:pPr algn="ctr"/>
-            <a:r>
-              <a:rPr sz="2200" b="0" i="1">
-                <a:solidFill>
-                  <a:srgbClr val="8C8C8C"/>
-                </a:solidFill>
-                <a:latin typeface="Arial"/>
-              </a:rPr>
-              <a:t/>
             </a:r>
           </a:p>
         </p:txBody>
@@ -4974,8 +4204,8 @@
         </p:nvSpPr>
         <p:spPr>
           <a:xfrm>
-            <a:off x="594360" y="2258568"/>
-            <a:ext cx="11002975" cy="685800"/>
+            <a:off x="640080" y="2052828"/>
+            <a:ext cx="10911535" cy="731520"/>
           </a:xfrm>
           <a:prstGeom prst="rect">
             <a:avLst/>
@@ -4990,7 +4220,7 @@
           <a:p>
             <a:pPr algn="ctr"/>
             <a:r>
-              <a:rPr sz="4400" b="1" i="0">
+              <a:rPr sz="4800" b="1" i="0">
                 <a:solidFill>
                   <a:srgbClr val="FFFFFF"/>
                 </a:solidFill>
@@ -5009,8 +4239,8 @@
         </p:nvSpPr>
         <p:spPr>
           <a:xfrm>
-            <a:off x="594360" y="2980944"/>
-            <a:ext cx="11002975" cy="347472"/>
+            <a:off x="640080" y="2985516"/>
+            <a:ext cx="10911535" cy="731520"/>
           </a:xfrm>
           <a:prstGeom prst="rect">
             <a:avLst/>
@@ -5025,83 +4255,13 @@
           <a:p>
             <a:pPr algn="ctr"/>
             <a:r>
-              <a:rPr sz="2200" b="0" i="1">
-                <a:solidFill>
-                  <a:srgbClr val="8C8C8C"/>
-                </a:solidFill>
-                <a:latin typeface="Arial"/>
-              </a:rPr>
-              <a:t/>
-            </a:r>
-          </a:p>
-        </p:txBody>
-      </p:sp>
-      <p:sp>
-        <p:nvSpPr>
-          <p:cNvPr id="4" name="TextBox 3"/>
-          <p:cNvSpPr txBox="1"/>
-          <p:nvPr/>
-        </p:nvSpPr>
-        <p:spPr>
-          <a:xfrm>
-            <a:off x="594360" y="3529584"/>
-            <a:ext cx="11002975" cy="685800"/>
-          </a:xfrm>
-          <a:prstGeom prst="rect">
-            <a:avLst/>
-          </a:prstGeom>
-          <a:noFill/>
-        </p:spPr>
-        <p:txBody>
-          <a:bodyPr wrap="square">
-            <a:spAutoFit/>
-          </a:bodyPr>
-          <a:lstStyle/>
-          <a:p>
-            <a:pPr algn="ctr"/>
-            <a:r>
-              <a:rPr sz="3911" b="1" i="0">
+              <a:rPr sz="4200" b="1" i="0">
                 <a:solidFill>
                   <a:srgbClr val="FFFFFF"/>
                 </a:solidFill>
                 <a:latin typeface="Arial"/>
               </a:rPr>
               <a:t>Vida eterna, Tu ganhaste naquele dia</a:t>
-            </a:r>
-          </a:p>
-        </p:txBody>
-      </p:sp>
-      <p:sp>
-        <p:nvSpPr>
-          <p:cNvPr id="5" name="TextBox 4"/>
-          <p:cNvSpPr txBox="1"/>
-          <p:nvPr/>
-        </p:nvSpPr>
-        <p:spPr>
-          <a:xfrm>
-            <a:off x="594360" y="4251960"/>
-            <a:ext cx="11002975" cy="347472"/>
-          </a:xfrm>
-          <a:prstGeom prst="rect">
-            <a:avLst/>
-          </a:prstGeom>
-          <a:noFill/>
-        </p:spPr>
-        <p:txBody>
-          <a:bodyPr wrap="square">
-            <a:spAutoFit/>
-          </a:bodyPr>
-          <a:lstStyle/>
-          <a:p>
-            <a:pPr algn="ctr"/>
-            <a:r>
-              <a:rPr sz="2200" b="0" i="1">
-                <a:solidFill>
-                  <a:srgbClr val="8C8C8C"/>
-                </a:solidFill>
-                <a:latin typeface="Arial"/>
-              </a:rPr>
-              <a:t/>
             </a:r>
           </a:p>
         </p:txBody>
@@ -5140,8 +4300,8 @@
         </p:nvSpPr>
         <p:spPr>
           <a:xfrm>
-            <a:off x="594360" y="2258568"/>
-            <a:ext cx="11002975" cy="685800"/>
+            <a:off x="640080" y="2052828"/>
+            <a:ext cx="10911535" cy="731520"/>
           </a:xfrm>
           <a:prstGeom prst="rect">
             <a:avLst/>
@@ -5156,7 +4316,7 @@
           <a:p>
             <a:pPr algn="ctr"/>
             <a:r>
-              <a:rPr sz="4400" b="1" i="0">
+              <a:rPr sz="4800" b="1" i="0">
                 <a:solidFill>
                   <a:srgbClr val="FFFFFF"/>
                 </a:solidFill>
@@ -5175,8 +4335,8 @@
         </p:nvSpPr>
         <p:spPr>
           <a:xfrm>
-            <a:off x="594360" y="2980944"/>
-            <a:ext cx="11002975" cy="347472"/>
+            <a:off x="640080" y="2985516"/>
+            <a:ext cx="10911535" cy="731520"/>
           </a:xfrm>
           <a:prstGeom prst="rect">
             <a:avLst/>
@@ -5191,83 +4351,13 @@
           <a:p>
             <a:pPr algn="ctr"/>
             <a:r>
-              <a:rPr sz="2200" b="0" i="1">
-                <a:solidFill>
-                  <a:srgbClr val="8C8C8C"/>
-                </a:solidFill>
-                <a:latin typeface="Arial"/>
-              </a:rPr>
-              <a:t/>
-            </a:r>
-          </a:p>
-        </p:txBody>
-      </p:sp>
-      <p:sp>
-        <p:nvSpPr>
-          <p:cNvPr id="4" name="TextBox 3"/>
-          <p:cNvSpPr txBox="1"/>
-          <p:nvPr/>
-        </p:nvSpPr>
-        <p:spPr>
-          <a:xfrm>
-            <a:off x="594360" y="3529584"/>
-            <a:ext cx="11002975" cy="685800"/>
-          </a:xfrm>
-          <a:prstGeom prst="rect">
-            <a:avLst/>
-          </a:prstGeom>
-          <a:noFill/>
-        </p:spPr>
-        <p:txBody>
-          <a:bodyPr wrap="square">
-            <a:spAutoFit/>
-          </a:bodyPr>
-          <a:lstStyle/>
-          <a:p>
-            <a:pPr algn="ctr"/>
-            <a:r>
-              <a:rPr sz="4400" b="1" i="0">
+              <a:rPr sz="4800" b="1" i="0">
                 <a:solidFill>
                   <a:srgbClr val="FFFFFF"/>
                 </a:solidFill>
                 <a:latin typeface="Arial"/>
               </a:rPr>
               <a:t>Ele está vivo</a:t>
-            </a:r>
-          </a:p>
-        </p:txBody>
-      </p:sp>
-      <p:sp>
-        <p:nvSpPr>
-          <p:cNvPr id="5" name="TextBox 4"/>
-          <p:cNvSpPr txBox="1"/>
-          <p:nvPr/>
-        </p:nvSpPr>
-        <p:spPr>
-          <a:xfrm>
-            <a:off x="594360" y="4251960"/>
-            <a:ext cx="11002975" cy="347472"/>
-          </a:xfrm>
-          <a:prstGeom prst="rect">
-            <a:avLst/>
-          </a:prstGeom>
-          <a:noFill/>
-        </p:spPr>
-        <p:txBody>
-          <a:bodyPr wrap="square">
-            <a:spAutoFit/>
-          </a:bodyPr>
-          <a:lstStyle/>
-          <a:p>
-            <a:pPr algn="ctr"/>
-            <a:r>
-              <a:rPr sz="2200" b="0" i="1">
-                <a:solidFill>
-                  <a:srgbClr val="8C8C8C"/>
-                </a:solidFill>
-                <a:latin typeface="Arial"/>
-              </a:rPr>
-              <a:t/>
             </a:r>
           </a:p>
         </p:txBody>
@@ -5306,8 +4396,8 @@
         </p:nvSpPr>
         <p:spPr>
           <a:xfrm>
-            <a:off x="594360" y="2258568"/>
-            <a:ext cx="11002975" cy="685800"/>
+            <a:off x="640080" y="2052828"/>
+            <a:ext cx="10911535" cy="731520"/>
           </a:xfrm>
           <a:prstGeom prst="rect">
             <a:avLst/>
@@ -5322,7 +4412,7 @@
           <a:p>
             <a:pPr algn="ctr"/>
             <a:r>
-              <a:rPr sz="4400" b="1" i="0">
+              <a:rPr sz="4800" b="1" i="0">
                 <a:solidFill>
                   <a:srgbClr val="FFFFFF"/>
                 </a:solidFill>
@@ -5341,8 +4431,8 @@
         </p:nvSpPr>
         <p:spPr>
           <a:xfrm>
-            <a:off x="594360" y="2980944"/>
-            <a:ext cx="11002975" cy="347472"/>
+            <a:off x="640080" y="2985516"/>
+            <a:ext cx="10911535" cy="731520"/>
           </a:xfrm>
           <a:prstGeom prst="rect">
             <a:avLst/>
@@ -5357,83 +4447,13 @@
           <a:p>
             <a:pPr algn="ctr"/>
             <a:r>
-              <a:rPr sz="2200" b="0" i="1">
-                <a:solidFill>
-                  <a:srgbClr val="8C8C8C"/>
-                </a:solidFill>
-                <a:latin typeface="Arial"/>
-              </a:rPr>
-              <a:t/>
-            </a:r>
-          </a:p>
-        </p:txBody>
-      </p:sp>
-      <p:sp>
-        <p:nvSpPr>
-          <p:cNvPr id="4" name="TextBox 3"/>
-          <p:cNvSpPr txBox="1"/>
-          <p:nvPr/>
-        </p:nvSpPr>
-        <p:spPr>
-          <a:xfrm>
-            <a:off x="594360" y="3529584"/>
-            <a:ext cx="11002975" cy="685800"/>
-          </a:xfrm>
-          <a:prstGeom prst="rect">
-            <a:avLst/>
-          </a:prstGeom>
-          <a:noFill/>
-        </p:spPr>
-        <p:txBody>
-          <a:bodyPr wrap="square">
-            <a:spAutoFit/>
-          </a:bodyPr>
-          <a:lstStyle/>
-          <a:p>
-            <a:pPr algn="ctr"/>
-            <a:r>
-              <a:rPr sz="4400" b="1" i="0">
+              <a:rPr sz="4800" b="1" i="0">
                 <a:solidFill>
                   <a:srgbClr val="FFFFFF"/>
                 </a:solidFill>
                 <a:latin typeface="Arial"/>
               </a:rPr>
               <a:t>Lavaste o meu pecado</a:t>
-            </a:r>
-          </a:p>
-        </p:txBody>
-      </p:sp>
-      <p:sp>
-        <p:nvSpPr>
-          <p:cNvPr id="5" name="TextBox 4"/>
-          <p:cNvSpPr txBox="1"/>
-          <p:nvPr/>
-        </p:nvSpPr>
-        <p:spPr>
-          <a:xfrm>
-            <a:off x="594360" y="4251960"/>
-            <a:ext cx="11002975" cy="347472"/>
-          </a:xfrm>
-          <a:prstGeom prst="rect">
-            <a:avLst/>
-          </a:prstGeom>
-          <a:noFill/>
-        </p:spPr>
-        <p:txBody>
-          <a:bodyPr wrap="square">
-            <a:spAutoFit/>
-          </a:bodyPr>
-          <a:lstStyle/>
-          <a:p>
-            <a:pPr algn="ctr"/>
-            <a:r>
-              <a:rPr sz="2200" b="0" i="1">
-                <a:solidFill>
-                  <a:srgbClr val="8C8C8C"/>
-                </a:solidFill>
-                <a:latin typeface="Arial"/>
-              </a:rPr>
-              <a:t/>
             </a:r>
           </a:p>
         </p:txBody>
@@ -5472,8 +4492,8 @@
         </p:nvSpPr>
         <p:spPr>
           <a:xfrm>
-            <a:off x="594360" y="2258568"/>
-            <a:ext cx="11002975" cy="685800"/>
+            <a:off x="640080" y="2052828"/>
+            <a:ext cx="10911535" cy="731520"/>
           </a:xfrm>
           <a:prstGeom prst="rect">
             <a:avLst/>
@@ -5488,7 +4508,7 @@
           <a:p>
             <a:pPr algn="ctr"/>
             <a:r>
-              <a:rPr sz="4400" b="1" i="0">
+              <a:rPr sz="4800" b="1" i="0">
                 <a:solidFill>
                   <a:srgbClr val="FFFFFF"/>
                 </a:solidFill>
@@ -5507,8 +4527,8 @@
         </p:nvSpPr>
         <p:spPr>
           <a:xfrm>
-            <a:off x="594360" y="2980944"/>
-            <a:ext cx="11002975" cy="347472"/>
+            <a:off x="640080" y="2985516"/>
+            <a:ext cx="10911535" cy="731520"/>
           </a:xfrm>
           <a:prstGeom prst="rect">
             <a:avLst/>
@@ -5523,83 +4543,13 @@
           <a:p>
             <a:pPr algn="ctr"/>
             <a:r>
-              <a:rPr sz="2200" b="0" i="1">
-                <a:solidFill>
-                  <a:srgbClr val="8C8C8C"/>
-                </a:solidFill>
-                <a:latin typeface="Arial"/>
-              </a:rPr>
-              <a:t/>
-            </a:r>
-          </a:p>
-        </p:txBody>
-      </p:sp>
-      <p:sp>
-        <p:nvSpPr>
-          <p:cNvPr id="4" name="TextBox 3"/>
-          <p:cNvSpPr txBox="1"/>
-          <p:nvPr/>
-        </p:nvSpPr>
-        <p:spPr>
-          <a:xfrm>
-            <a:off x="594360" y="3529584"/>
-            <a:ext cx="11002975" cy="685800"/>
-          </a:xfrm>
-          <a:prstGeom prst="rect">
-            <a:avLst/>
-          </a:prstGeom>
-          <a:noFill/>
-        </p:spPr>
-        <p:txBody>
-          <a:bodyPr wrap="square">
-            <a:spAutoFit/>
-          </a:bodyPr>
-          <a:lstStyle/>
-          <a:p>
-            <a:pPr algn="ctr"/>
-            <a:r>
-              <a:rPr sz="4400" b="1" i="0">
+              <a:rPr sz="4800" b="1" i="0">
                 <a:solidFill>
                   <a:srgbClr val="FFFFFF"/>
                 </a:solidFill>
                 <a:latin typeface="Arial"/>
               </a:rPr>
               <a:t>Para sempre sou mudado</a:t>
-            </a:r>
-          </a:p>
-        </p:txBody>
-      </p:sp>
-      <p:sp>
-        <p:nvSpPr>
-          <p:cNvPr id="5" name="TextBox 4"/>
-          <p:cNvSpPr txBox="1"/>
-          <p:nvPr/>
-        </p:nvSpPr>
-        <p:spPr>
-          <a:xfrm>
-            <a:off x="594360" y="4251960"/>
-            <a:ext cx="11002975" cy="347472"/>
-          </a:xfrm>
-          <a:prstGeom prst="rect">
-            <a:avLst/>
-          </a:prstGeom>
-          <a:noFill/>
-        </p:spPr>
-        <p:txBody>
-          <a:bodyPr wrap="square">
-            <a:spAutoFit/>
-          </a:bodyPr>
-          <a:lstStyle/>
-          <a:p>
-            <a:pPr algn="ctr"/>
-            <a:r>
-              <a:rPr sz="2200" b="0" i="1">
-                <a:solidFill>
-                  <a:srgbClr val="8C8C8C"/>
-                </a:solidFill>
-                <a:latin typeface="Arial"/>
-              </a:rPr>
-              <a:t/>
             </a:r>
           </a:p>
         </p:txBody>
@@ -5638,8 +4588,8 @@
         </p:nvSpPr>
         <p:spPr>
           <a:xfrm>
-            <a:off x="594360" y="2894076"/>
-            <a:ext cx="11002975" cy="685800"/>
+            <a:off x="640080" y="2702052"/>
+            <a:ext cx="10911535" cy="731520"/>
           </a:xfrm>
           <a:prstGeom prst="rect">
             <a:avLst/>
@@ -5654,48 +4604,13 @@
           <a:p>
             <a:pPr algn="ctr"/>
             <a:r>
-              <a:rPr sz="4400" b="1" i="0">
+              <a:rPr sz="4800" b="1" i="0">
                 <a:solidFill>
                   <a:srgbClr val="FFFFFF"/>
                 </a:solidFill>
                 <a:latin typeface="Arial"/>
               </a:rPr>
               <a:t>Quando eu estiver naquele lugar</a:t>
-            </a:r>
-          </a:p>
-        </p:txBody>
-      </p:sp>
-      <p:sp>
-        <p:nvSpPr>
-          <p:cNvPr id="3" name="TextBox 2"/>
-          <p:cNvSpPr txBox="1"/>
-          <p:nvPr/>
-        </p:nvSpPr>
-        <p:spPr>
-          <a:xfrm>
-            <a:off x="594360" y="3616452"/>
-            <a:ext cx="11002975" cy="347472"/>
-          </a:xfrm>
-          <a:prstGeom prst="rect">
-            <a:avLst/>
-          </a:prstGeom>
-          <a:noFill/>
-        </p:spPr>
-        <p:txBody>
-          <a:bodyPr wrap="square">
-            <a:spAutoFit/>
-          </a:bodyPr>
-          <a:lstStyle/>
-          <a:p>
-            <a:pPr algn="ctr"/>
-            <a:r>
-              <a:rPr sz="2200" b="0" i="1">
-                <a:solidFill>
-                  <a:srgbClr val="8C8C8C"/>
-                </a:solidFill>
-                <a:latin typeface="Arial"/>
-              </a:rPr>
-              <a:t/>
             </a:r>
           </a:p>
         </p:txBody>
@@ -5734,8 +4649,8 @@
         </p:nvSpPr>
         <p:spPr>
           <a:xfrm>
-            <a:off x="594360" y="1837944"/>
-            <a:ext cx="11002975" cy="685800"/>
+            <a:off x="640080" y="1650492"/>
+            <a:ext cx="10911535" cy="731520"/>
           </a:xfrm>
           <a:prstGeom prst="rect">
             <a:avLst/>
@@ -5750,7 +4665,7 @@
           <a:p>
             <a:pPr algn="ctr"/>
             <a:r>
-              <a:rPr sz="4400" b="1" i="0">
+              <a:rPr sz="4800" b="1" i="0">
                 <a:solidFill>
                   <a:srgbClr val="FFFFFF"/>
                 </a:solidFill>
@@ -5769,8 +4684,8 @@
         </p:nvSpPr>
         <p:spPr>
           <a:xfrm>
-            <a:off x="594360" y="2560320"/>
-            <a:ext cx="11002975" cy="384048"/>
+            <a:off x="640080" y="2418588"/>
+            <a:ext cx="10911535" cy="365760"/>
           </a:xfrm>
           <a:prstGeom prst="rect">
             <a:avLst/>
@@ -5787,7 +4702,7 @@
             <a:r>
               <a:rPr sz="2400" b="0" i="1">
                 <a:solidFill>
-                  <a:srgbClr val="B4B4B4"/>
+                  <a:srgbClr val="AAAAAA"/>
                 </a:solidFill>
                 <a:latin typeface="Arial"/>
               </a:rPr>
@@ -5804,8 +4719,8 @@
         </p:nvSpPr>
         <p:spPr>
           <a:xfrm>
-            <a:off x="594360" y="2980944"/>
-            <a:ext cx="11002975" cy="347472"/>
+            <a:off x="640080" y="2985516"/>
+            <a:ext cx="10911535" cy="731520"/>
           </a:xfrm>
           <a:prstGeom prst="rect">
             <a:avLst/>
@@ -5820,13 +4735,13 @@
           <a:p>
             <a:pPr algn="ctr"/>
             <a:r>
-              <a:rPr sz="2000" b="0" i="1">
-                <a:solidFill>
-                  <a:srgbClr val="8C8C8C"/>
+              <a:rPr sz="4800" b="1" i="0">
+                <a:solidFill>
+                  <a:srgbClr val="FFFFFF"/>
                 </a:solidFill>
                 <a:latin typeface="Arial"/>
               </a:rPr>
-              <a:t/>
+              <a:t>喜びいつまでも</a:t>
             </a:r>
           </a:p>
         </p:txBody>
@@ -5839,8 +4754,8 @@
         </p:nvSpPr>
         <p:spPr>
           <a:xfrm>
-            <a:off x="594360" y="3529584"/>
-            <a:ext cx="11002975" cy="685800"/>
+            <a:off x="640080" y="3753612"/>
+            <a:ext cx="10911535" cy="365760"/>
           </a:xfrm>
           <a:prstGeom prst="rect">
             <a:avLst/>
@@ -5855,13 +4770,13 @@
           <a:p>
             <a:pPr algn="ctr"/>
             <a:r>
-              <a:rPr sz="4400" b="1" i="0">
-                <a:solidFill>
-                  <a:srgbClr val="FFFFFF"/>
+              <a:rPr sz="2400" b="0" i="1">
+                <a:solidFill>
+                  <a:srgbClr val="AAAAAA"/>
                 </a:solidFill>
                 <a:latin typeface="Arial"/>
               </a:rPr>
-              <a:t>喜びいつまでも</a:t>
+              <a:t>yorokobi itsumademo</a:t>
             </a:r>
           </a:p>
         </p:txBody>
@@ -5874,8 +4789,8 @@
         </p:nvSpPr>
         <p:spPr>
           <a:xfrm>
-            <a:off x="594360" y="4251960"/>
-            <a:ext cx="11002975" cy="384048"/>
+            <a:off x="640080" y="4530852"/>
+            <a:ext cx="10911535" cy="310896"/>
           </a:xfrm>
           <a:prstGeom prst="rect">
             <a:avLst/>
@@ -5890,13 +4805,13 @@
           <a:p>
             <a:pPr algn="ctr"/>
             <a:r>
-              <a:rPr sz="2400" b="0" i="1">
-                <a:solidFill>
-                  <a:srgbClr val="B4B4B4"/>
+              <a:rPr sz="2000" b="0" i="1">
+                <a:solidFill>
+                  <a:srgbClr val="828282"/>
                 </a:solidFill>
                 <a:latin typeface="Arial"/>
               </a:rPr>
-              <a:t>yorokobi itsumademo</a:t>
+              <a:t>Dia Feliz</a:t>
             </a:r>
           </a:p>
         </p:txBody>
@@ -5909,8 +4824,8 @@
         </p:nvSpPr>
         <p:spPr>
           <a:xfrm>
-            <a:off x="594360" y="4672584"/>
-            <a:ext cx="11002975" cy="347472"/>
+            <a:off x="640080" y="4896612"/>
+            <a:ext cx="10911535" cy="310896"/>
           </a:xfrm>
           <a:prstGeom prst="rect">
             <a:avLst/>
@@ -5927,11 +4842,11 @@
             <a:r>
               <a:rPr sz="2000" b="0" i="1">
                 <a:solidFill>
-                  <a:srgbClr val="8C8C8C"/>
+                  <a:srgbClr val="828282"/>
                 </a:solidFill>
                 <a:latin typeface="Arial"/>
               </a:rPr>
-              <a:t/>
+              <a:t>Ó grande dia na história: a morte foi derrotada</a:t>
             </a:r>
           </a:p>
         </p:txBody>
@@ -5970,8 +4885,8 @@
         </p:nvSpPr>
         <p:spPr>
           <a:xfrm>
-            <a:off x="594360" y="1837944"/>
-            <a:ext cx="11002975" cy="685800"/>
+            <a:off x="640080" y="1650492"/>
+            <a:ext cx="10911535" cy="731520"/>
           </a:xfrm>
           <a:prstGeom prst="rect">
             <a:avLst/>
@@ -5986,7 +4901,7 @@
           <a:p>
             <a:pPr algn="ctr"/>
             <a:r>
-              <a:rPr sz="4400" b="1" i="0">
+              <a:rPr sz="4800" b="1" i="0">
                 <a:solidFill>
                   <a:srgbClr val="FFFFFF"/>
                 </a:solidFill>
@@ -6005,8 +4920,8 @@
         </p:nvSpPr>
         <p:spPr>
           <a:xfrm>
-            <a:off x="594360" y="2560320"/>
-            <a:ext cx="11002975" cy="384048"/>
+            <a:off x="640080" y="2418588"/>
+            <a:ext cx="10911535" cy="365760"/>
           </a:xfrm>
           <a:prstGeom prst="rect">
             <a:avLst/>
@@ -6023,7 +4938,7 @@
             <a:r>
               <a:rPr sz="2400" b="0" i="1">
                 <a:solidFill>
-                  <a:srgbClr val="B4B4B4"/>
+                  <a:srgbClr val="AAAAAA"/>
                 </a:solidFill>
                 <a:latin typeface="Arial"/>
               </a:rPr>
@@ -6040,8 +4955,8 @@
         </p:nvSpPr>
         <p:spPr>
           <a:xfrm>
-            <a:off x="594360" y="2980944"/>
-            <a:ext cx="11002975" cy="347472"/>
+            <a:off x="640080" y="2985516"/>
+            <a:ext cx="10911535" cy="731520"/>
           </a:xfrm>
           <a:prstGeom prst="rect">
             <a:avLst/>
@@ -6056,13 +4971,13 @@
           <a:p>
             <a:pPr algn="ctr"/>
             <a:r>
-              <a:rPr sz="2000" b="0" i="1">
-                <a:solidFill>
-                  <a:srgbClr val="8C8C8C"/>
+              <a:rPr sz="4800" b="1" i="0">
+                <a:solidFill>
+                  <a:srgbClr val="FFFFFF"/>
                 </a:solidFill>
                 <a:latin typeface="Arial"/>
               </a:rPr>
-              <a:t/>
+              <a:t>叫べよみがえられた    イエスに</a:t>
             </a:r>
           </a:p>
         </p:txBody>
@@ -6075,8 +4990,8 @@
         </p:nvSpPr>
         <p:spPr>
           <a:xfrm>
-            <a:off x="594360" y="3529584"/>
-            <a:ext cx="11002975" cy="685800"/>
+            <a:off x="640080" y="3753612"/>
+            <a:ext cx="10911535" cy="365760"/>
           </a:xfrm>
           <a:prstGeom prst="rect">
             <a:avLst/>
@@ -6091,13 +5006,13 @@
           <a:p>
             <a:pPr algn="ctr"/>
             <a:r>
-              <a:rPr sz="4400" b="1" i="0">
-                <a:solidFill>
-                  <a:srgbClr val="FFFFFF"/>
+              <a:rPr sz="2400" b="0" i="1">
+                <a:solidFill>
+                  <a:srgbClr val="AAAAAA"/>
                 </a:solidFill>
                 <a:latin typeface="Arial"/>
               </a:rPr>
-              <a:t>叫べよみがえられた    イエスに</a:t>
+              <a:t>sakebe yomigaerareta   iesu ni</a:t>
             </a:r>
           </a:p>
         </p:txBody>
@@ -6110,8 +5025,8 @@
         </p:nvSpPr>
         <p:spPr>
           <a:xfrm>
-            <a:off x="594360" y="4251960"/>
-            <a:ext cx="11002975" cy="384048"/>
+            <a:off x="640080" y="4530852"/>
+            <a:ext cx="10911535" cy="310896"/>
           </a:xfrm>
           <a:prstGeom prst="rect">
             <a:avLst/>
@@ -6126,13 +5041,13 @@
           <a:p>
             <a:pPr algn="ctr"/>
             <a:r>
-              <a:rPr sz="2400" b="0" i="1">
-                <a:solidFill>
-                  <a:srgbClr val="B4B4B4"/>
+              <a:rPr sz="2000" b="0" i="1">
+                <a:solidFill>
+                  <a:srgbClr val="828282"/>
                 </a:solidFill>
                 <a:latin typeface="Arial"/>
               </a:rPr>
-              <a:t>sakebe yomigaerareta   iesu ni</a:t>
+              <a:t>Tu me salvaste</a:t>
             </a:r>
           </a:p>
         </p:txBody>
@@ -6145,8 +5060,8 @@
         </p:nvSpPr>
         <p:spPr>
           <a:xfrm>
-            <a:off x="594360" y="4672584"/>
-            <a:ext cx="11002975" cy="347472"/>
+            <a:off x="640080" y="4896612"/>
+            <a:ext cx="10911535" cy="310896"/>
           </a:xfrm>
           <a:prstGeom prst="rect">
             <a:avLst/>
@@ -6163,11 +5078,11 @@
             <a:r>
               <a:rPr sz="2000" b="0" i="1">
                 <a:solidFill>
-                  <a:srgbClr val="8C8C8C"/>
+                  <a:srgbClr val="828282"/>
                 </a:solidFill>
                 <a:latin typeface="Arial"/>
               </a:rPr>
-              <a:t/>
+              <a:t>Cante: Jesus está vivo</a:t>
             </a:r>
           </a:p>
         </p:txBody>

--- a/output_pptx/Happy_Day.pptx
+++ b/output_pptx/Happy_Day.pptx
@@ -3184,6 +3184,76 @@
           </a:p>
         </p:txBody>
       </p:sp>
+      <p:sp>
+        <p:nvSpPr>
+          <p:cNvPr id="4" name="TextBox 3"/>
+          <p:cNvSpPr txBox="1"/>
+          <p:nvPr/>
+        </p:nvSpPr>
+        <p:spPr>
+          <a:xfrm>
+            <a:off x="640080" y="4128516"/>
+            <a:ext cx="10911535" cy="310896"/>
+          </a:xfrm>
+          <a:prstGeom prst="rect">
+            <a:avLst/>
+          </a:prstGeom>
+          <a:noFill/>
+        </p:spPr>
+        <p:txBody>
+          <a:bodyPr wrap="square">
+            <a:spAutoFit/>
+          </a:bodyPr>
+          <a:lstStyle/>
+          <a:p>
+            <a:pPr algn="ctr"/>
+            <a:r>
+              <a:rPr sz="2000" b="0" i="0">
+                <a:solidFill>
+                  <a:srgbClr val="828282"/>
+                </a:solidFill>
+                <a:latin typeface="Arial"/>
+              </a:rPr>
+              <a:t>幸いな日</a:t>
+            </a:r>
+          </a:p>
+        </p:txBody>
+      </p:sp>
+      <p:sp>
+        <p:nvSpPr>
+          <p:cNvPr id="5" name="TextBox 4"/>
+          <p:cNvSpPr txBox="1"/>
+          <p:nvPr/>
+        </p:nvSpPr>
+        <p:spPr>
+          <a:xfrm>
+            <a:off x="640080" y="4494276"/>
+            <a:ext cx="10911535" cy="310896"/>
+          </a:xfrm>
+          <a:prstGeom prst="rect">
+            <a:avLst/>
+          </a:prstGeom>
+          <a:noFill/>
+        </p:spPr>
+        <p:txBody>
+          <a:bodyPr wrap="square">
+            <a:spAutoFit/>
+          </a:bodyPr>
+          <a:lstStyle/>
+          <a:p>
+            <a:pPr algn="ctr"/>
+            <a:r>
+              <a:rPr sz="2000" b="0" i="0">
+                <a:solidFill>
+                  <a:srgbClr val="828282"/>
+                </a:solidFill>
+                <a:latin typeface="Arial"/>
+              </a:rPr>
+              <a:t>おお、歴史における大いなる日よ：死は打ち負かされた</a:t>
+            </a:r>
+          </a:p>
+        </p:txBody>
+      </p:sp>
     </p:spTree>
   </p:cSld>
   <p:clrMapOvr>
@@ -3280,6 +3350,76 @@
           </a:p>
         </p:txBody>
       </p:sp>
+      <p:sp>
+        <p:nvSpPr>
+          <p:cNvPr id="4" name="TextBox 3"/>
+          <p:cNvSpPr txBox="1"/>
+          <p:nvPr/>
+        </p:nvSpPr>
+        <p:spPr>
+          <a:xfrm>
+            <a:off x="640080" y="4128516"/>
+            <a:ext cx="10911535" cy="310896"/>
+          </a:xfrm>
+          <a:prstGeom prst="rect">
+            <a:avLst/>
+          </a:prstGeom>
+          <a:noFill/>
+        </p:spPr>
+        <p:txBody>
+          <a:bodyPr wrap="square">
+            <a:spAutoFit/>
+          </a:bodyPr>
+          <a:lstStyle/>
+          <a:p>
+            <a:pPr algn="ctr"/>
+            <a:r>
+              <a:rPr sz="2000" b="0" i="0">
+                <a:solidFill>
+                  <a:srgbClr val="828282"/>
+                </a:solidFill>
+                <a:latin typeface="Arial"/>
+              </a:rPr>
+              <a:t>叫べ：イエスは生きている</a:t>
+            </a:r>
+          </a:p>
+        </p:txBody>
+      </p:sp>
+      <p:sp>
+        <p:nvSpPr>
+          <p:cNvPr id="5" name="TextBox 4"/>
+          <p:cNvSpPr txBox="1"/>
+          <p:nvPr/>
+        </p:nvSpPr>
+        <p:spPr>
+          <a:xfrm>
+            <a:off x="640080" y="4494276"/>
+            <a:ext cx="10911535" cy="310896"/>
+          </a:xfrm>
+          <a:prstGeom prst="rect">
+            <a:avLst/>
+          </a:prstGeom>
+          <a:noFill/>
+        </p:spPr>
+        <p:txBody>
+          <a:bodyPr wrap="square">
+            <a:spAutoFit/>
+          </a:bodyPr>
+          <a:lstStyle/>
+          <a:p>
+            <a:pPr algn="ctr"/>
+            <a:r>
+              <a:rPr sz="2000" b="0" i="0">
+                <a:solidFill>
+                  <a:srgbClr val="828282"/>
+                </a:solidFill>
+                <a:latin typeface="Arial"/>
+              </a:rPr>
+              <a:t>彼は生きている</a:t>
+            </a:r>
+          </a:p>
+        </p:txBody>
+      </p:sp>
     </p:spTree>
   </p:cSld>
   <p:clrMapOvr>
@@ -3376,6 +3516,76 @@
           </a:p>
         </p:txBody>
       </p:sp>
+      <p:sp>
+        <p:nvSpPr>
+          <p:cNvPr id="4" name="TextBox 3"/>
+          <p:cNvSpPr txBox="1"/>
+          <p:nvPr/>
+        </p:nvSpPr>
+        <p:spPr>
+          <a:xfrm>
+            <a:off x="640080" y="4128516"/>
+            <a:ext cx="10911535" cy="310896"/>
+          </a:xfrm>
+          <a:prstGeom prst="rect">
+            <a:avLst/>
+          </a:prstGeom>
+          <a:noFill/>
+        </p:spPr>
+        <p:txBody>
+          <a:bodyPr wrap="square">
+            <a:spAutoFit/>
+          </a:bodyPr>
+          <a:lstStyle/>
+          <a:p>
+            <a:pPr algn="ctr"/>
+            <a:r>
+              <a:rPr sz="2000" b="0" i="0">
+                <a:solidFill>
+                  <a:srgbClr val="828282"/>
+                </a:solidFill>
+                <a:latin typeface="Arial"/>
+              </a:rPr>
+              <a:t>おお幸いな日よ、幸いな日よ</a:t>
+            </a:r>
+          </a:p>
+        </p:txBody>
+      </p:sp>
+      <p:sp>
+        <p:nvSpPr>
+          <p:cNvPr id="5" name="TextBox 4"/>
+          <p:cNvSpPr txBox="1"/>
+          <p:nvPr/>
+        </p:nvSpPr>
+        <p:spPr>
+          <a:xfrm>
+            <a:off x="640080" y="4494276"/>
+            <a:ext cx="10911535" cy="310896"/>
+          </a:xfrm>
+          <a:prstGeom prst="rect">
+            <a:avLst/>
+          </a:prstGeom>
+          <a:noFill/>
+        </p:spPr>
+        <p:txBody>
+          <a:bodyPr wrap="square">
+            <a:spAutoFit/>
+          </a:bodyPr>
+          <a:lstStyle/>
+          <a:p>
+            <a:pPr algn="ctr"/>
+            <a:r>
+              <a:rPr sz="2000" b="0" i="0">
+                <a:solidFill>
+                  <a:srgbClr val="828282"/>
+                </a:solidFill>
+                <a:latin typeface="Arial"/>
+              </a:rPr>
+              <a:t>あなたは私の罪を洗い流した</a:t>
+            </a:r>
+          </a:p>
+        </p:txBody>
+      </p:sp>
     </p:spTree>
   </p:cSld>
   <p:clrMapOvr>
@@ -3472,6 +3682,76 @@
           </a:p>
         </p:txBody>
       </p:sp>
+      <p:sp>
+        <p:nvSpPr>
+          <p:cNvPr id="4" name="TextBox 3"/>
+          <p:cNvSpPr txBox="1"/>
+          <p:nvPr/>
+        </p:nvSpPr>
+        <p:spPr>
+          <a:xfrm>
+            <a:off x="640080" y="4128516"/>
+            <a:ext cx="10911535" cy="310896"/>
+          </a:xfrm>
+          <a:prstGeom prst="rect">
+            <a:avLst/>
+          </a:prstGeom>
+          <a:noFill/>
+        </p:spPr>
+        <p:txBody>
+          <a:bodyPr wrap="square">
+            <a:spAutoFit/>
+          </a:bodyPr>
+          <a:lstStyle/>
+          <a:p>
+            <a:pPr algn="ctr"/>
+            <a:r>
+              <a:rPr sz="2000" b="0" i="0">
+                <a:solidFill>
+                  <a:srgbClr val="828282"/>
+                </a:solidFill>
+                <a:latin typeface="Arial"/>
+              </a:rPr>
+              <a:t>おお幸いな日よ、幸いな日よ</a:t>
+            </a:r>
+          </a:p>
+        </p:txBody>
+      </p:sp>
+      <p:sp>
+        <p:nvSpPr>
+          <p:cNvPr id="5" name="TextBox 4"/>
+          <p:cNvSpPr txBox="1"/>
+          <p:nvPr/>
+        </p:nvSpPr>
+        <p:spPr>
+          <a:xfrm>
+            <a:off x="640080" y="4494276"/>
+            <a:ext cx="10911535" cy="310896"/>
+          </a:xfrm>
+          <a:prstGeom prst="rect">
+            <a:avLst/>
+          </a:prstGeom>
+          <a:noFill/>
+        </p:spPr>
+        <p:txBody>
+          <a:bodyPr wrap="square">
+            <a:spAutoFit/>
+          </a:bodyPr>
+          <a:lstStyle/>
+          <a:p>
+            <a:pPr algn="ctr"/>
+            <a:r>
+              <a:rPr sz="2000" b="0" i="0">
+                <a:solidFill>
+                  <a:srgbClr val="828282"/>
+                </a:solidFill>
+                <a:latin typeface="Arial"/>
+              </a:rPr>
+              <a:t>永遠に私は変えられた</a:t>
+            </a:r>
+          </a:p>
+        </p:txBody>
+      </p:sp>
     </p:spTree>
   </p:cSld>
   <p:clrMapOvr>
@@ -3533,6 +3813,41 @@
           </a:p>
         </p:txBody>
       </p:sp>
+      <p:sp>
+        <p:nvSpPr>
+          <p:cNvPr id="3" name="TextBox 2"/>
+          <p:cNvSpPr txBox="1"/>
+          <p:nvPr/>
+        </p:nvSpPr>
+        <p:spPr>
+          <a:xfrm>
+            <a:off x="640080" y="3845052"/>
+            <a:ext cx="10911535" cy="310896"/>
+          </a:xfrm>
+          <a:prstGeom prst="rect">
+            <a:avLst/>
+          </a:prstGeom>
+          <a:noFill/>
+        </p:spPr>
+        <p:txBody>
+          <a:bodyPr wrap="square">
+            <a:spAutoFit/>
+          </a:bodyPr>
+          <a:lstStyle/>
+          <a:p>
+            <a:pPr algn="ctr"/>
+            <a:r>
+              <a:rPr sz="2000" b="0" i="0">
+                <a:solidFill>
+                  <a:srgbClr val="828282"/>
+                </a:solidFill>
+                <a:latin typeface="Arial"/>
+              </a:rPr>
+              <a:t>私があの場所にいるとき</a:t>
+            </a:r>
+          </a:p>
+        </p:txBody>
+      </p:sp>
     </p:spTree>
   </p:cSld>
   <p:clrMapOvr>
@@ -3629,6 +3944,76 @@
           </a:p>
         </p:txBody>
       </p:sp>
+      <p:sp>
+        <p:nvSpPr>
+          <p:cNvPr id="4" name="TextBox 3"/>
+          <p:cNvSpPr txBox="1"/>
+          <p:nvPr/>
+        </p:nvSpPr>
+        <p:spPr>
+          <a:xfrm>
+            <a:off x="640080" y="4128516"/>
+            <a:ext cx="10911535" cy="310896"/>
+          </a:xfrm>
+          <a:prstGeom prst="rect">
+            <a:avLst/>
+          </a:prstGeom>
+          <a:noFill/>
+        </p:spPr>
+        <p:txBody>
+          <a:bodyPr wrap="square">
+            <a:spAutoFit/>
+          </a:bodyPr>
+          <a:lstStyle/>
+          <a:p>
+            <a:pPr algn="ctr"/>
+            <a:r>
+              <a:rPr sz="2000" b="0" i="0">
+                <a:solidFill>
+                  <a:srgbClr val="828282"/>
+                </a:solidFill>
+                <a:latin typeface="Arial"/>
+              </a:rPr>
+              <a:t>ついにあなたの顔を見る自由</a:t>
+            </a:r>
+          </a:p>
+        </p:txBody>
+      </p:sp>
+      <p:sp>
+        <p:nvSpPr>
+          <p:cNvPr id="5" name="TextBox 4"/>
+          <p:cNvSpPr txBox="1"/>
+          <p:nvPr/>
+        </p:nvSpPr>
+        <p:spPr>
+          <a:xfrm>
+            <a:off x="640080" y="4494276"/>
+            <a:ext cx="10911535" cy="310896"/>
+          </a:xfrm>
+          <a:prstGeom prst="rect">
+            <a:avLst/>
+          </a:prstGeom>
+          <a:noFill/>
+        </p:spPr>
+        <p:txBody>
+          <a:bodyPr wrap="square">
+            <a:spAutoFit/>
+          </a:bodyPr>
+          <a:lstStyle/>
+          <a:p>
+            <a:pPr algn="ctr"/>
+            <a:r>
+              <a:rPr sz="2000" b="0" i="0">
+                <a:solidFill>
+                  <a:srgbClr val="828282"/>
+                </a:solidFill>
+                <a:latin typeface="Arial"/>
+              </a:rPr>
+              <a:t>私はあなたのもの、イエスよ、あなたは私のもの</a:t>
+            </a:r>
+          </a:p>
+        </p:txBody>
+      </p:sp>
     </p:spTree>
   </p:cSld>
   <p:clrMapOvr>
@@ -3725,6 +4110,76 @@
           </a:p>
         </p:txBody>
       </p:sp>
+      <p:sp>
+        <p:nvSpPr>
+          <p:cNvPr id="4" name="TextBox 3"/>
+          <p:cNvSpPr txBox="1"/>
+          <p:nvPr/>
+        </p:nvSpPr>
+        <p:spPr>
+          <a:xfrm>
+            <a:off x="640080" y="4128516"/>
+            <a:ext cx="10911535" cy="310896"/>
+          </a:xfrm>
+          <a:prstGeom prst="rect">
+            <a:avLst/>
+          </a:prstGeom>
+          <a:noFill/>
+        </p:spPr>
+        <p:txBody>
+          <a:bodyPr wrap="square">
+            <a:spAutoFit/>
+          </a:bodyPr>
+          <a:lstStyle/>
+          <a:p>
+            <a:pPr algn="ctr"/>
+            <a:r>
+              <a:rPr sz="2000" b="0" i="0">
+                <a:solidFill>
+                  <a:srgbClr val="828282"/>
+                </a:solidFill>
+                <a:latin typeface="Arial"/>
+              </a:rPr>
+              <a:t>限りない喜び、完全な平安</a:t>
+            </a:r>
+          </a:p>
+        </p:txBody>
+      </p:sp>
+      <p:sp>
+        <p:nvSpPr>
+          <p:cNvPr id="5" name="TextBox 4"/>
+          <p:cNvSpPr txBox="1"/>
+          <p:nvPr/>
+        </p:nvSpPr>
+        <p:spPr>
+          <a:xfrm>
+            <a:off x="640080" y="4494276"/>
+            <a:ext cx="10911535" cy="310896"/>
+          </a:xfrm>
+          <a:prstGeom prst="rect">
+            <a:avLst/>
+          </a:prstGeom>
+          <a:noFill/>
+        </p:spPr>
+        <p:txBody>
+          <a:bodyPr wrap="square">
+            <a:spAutoFit/>
+          </a:bodyPr>
+          <a:lstStyle/>
+          <a:p>
+            <a:pPr algn="ctr"/>
+            <a:r>
+              <a:rPr sz="2000" b="0" i="0">
+                <a:solidFill>
+                  <a:srgbClr val="828282"/>
+                </a:solidFill>
+                <a:latin typeface="Arial"/>
+              </a:rPr>
+              <a:t>すべての地上の苦しみはついに終わる</a:t>
+            </a:r>
+          </a:p>
+        </p:txBody>
+      </p:sp>
     </p:spTree>
   </p:cSld>
   <p:clrMapOvr>
@@ -3786,6 +4241,41 @@
           </a:p>
         </p:txBody>
       </p:sp>
+      <p:sp>
+        <p:nvSpPr>
+          <p:cNvPr id="3" name="TextBox 2"/>
+          <p:cNvSpPr txBox="1"/>
+          <p:nvPr/>
+        </p:nvSpPr>
+        <p:spPr>
+          <a:xfrm>
+            <a:off x="640080" y="3845052"/>
+            <a:ext cx="10911535" cy="310896"/>
+          </a:xfrm>
+          <a:prstGeom prst="rect">
+            <a:avLst/>
+          </a:prstGeom>
+          <a:noFill/>
+        </p:spPr>
+        <p:txBody>
+          <a:bodyPr wrap="square">
+            <a:spAutoFit/>
+          </a:bodyPr>
+          <a:lstStyle/>
+          <a:p>
+            <a:pPr algn="ctr"/>
+            <a:r>
+              <a:rPr sz="2000" b="0" i="0">
+                <a:solidFill>
+                  <a:srgbClr val="828282"/>
+                </a:solidFill>
+                <a:latin typeface="Arial"/>
+              </a:rPr>
+              <a:t>叫べ：イエスは生きている</a:t>
+            </a:r>
+          </a:p>
+        </p:txBody>
+      </p:sp>
     </p:spTree>
   </p:cSld>
   <p:clrMapOvr>
@@ -3882,6 +4372,76 @@
           </a:p>
         </p:txBody>
       </p:sp>
+      <p:sp>
+        <p:nvSpPr>
+          <p:cNvPr id="4" name="TextBox 3"/>
+          <p:cNvSpPr txBox="1"/>
+          <p:nvPr/>
+        </p:nvSpPr>
+        <p:spPr>
+          <a:xfrm>
+            <a:off x="640080" y="4128516"/>
+            <a:ext cx="10911535" cy="310896"/>
+          </a:xfrm>
+          <a:prstGeom prst="rect">
+            <a:avLst/>
+          </a:prstGeom>
+          <a:noFill/>
+        </p:spPr>
+        <p:txBody>
+          <a:bodyPr wrap="square">
+            <a:spAutoFit/>
+          </a:bodyPr>
+          <a:lstStyle/>
+          <a:p>
+            <a:pPr algn="ctr"/>
+            <a:r>
+              <a:rPr sz="2000" b="0" i="0">
+                <a:solidFill>
+                  <a:srgbClr val="828282"/>
+                </a:solidFill>
+                <a:latin typeface="Arial"/>
+              </a:rPr>
+              <a:t>彼は生きている</a:t>
+            </a:r>
+          </a:p>
+        </p:txBody>
+      </p:sp>
+      <p:sp>
+        <p:nvSpPr>
+          <p:cNvPr id="5" name="TextBox 4"/>
+          <p:cNvSpPr txBox="1"/>
+          <p:nvPr/>
+        </p:nvSpPr>
+        <p:spPr>
+          <a:xfrm>
+            <a:off x="640080" y="4494276"/>
+            <a:ext cx="10911535" cy="310896"/>
+          </a:xfrm>
+          <a:prstGeom prst="rect">
+            <a:avLst/>
+          </a:prstGeom>
+          <a:noFill/>
+        </p:spPr>
+        <p:txBody>
+          <a:bodyPr wrap="square">
+            <a:spAutoFit/>
+          </a:bodyPr>
+          <a:lstStyle/>
+          <a:p>
+            <a:pPr algn="ctr"/>
+            <a:r>
+              <a:rPr sz="2000" b="0" i="0">
+                <a:solidFill>
+                  <a:srgbClr val="828282"/>
+                </a:solidFill>
+                <a:latin typeface="Arial"/>
+              </a:rPr>
+              <a:t>おお、なんと栄光の日か</a:t>
+            </a:r>
+          </a:p>
+        </p:txBody>
+      </p:sp>
     </p:spTree>
   </p:cSld>
   <p:clrMapOvr>
@@ -3978,6 +4538,76 @@
           </a:p>
         </p:txBody>
       </p:sp>
+      <p:sp>
+        <p:nvSpPr>
+          <p:cNvPr id="4" name="TextBox 3"/>
+          <p:cNvSpPr txBox="1"/>
+          <p:nvPr/>
+        </p:nvSpPr>
+        <p:spPr>
+          <a:xfrm>
+            <a:off x="640080" y="4128516"/>
+            <a:ext cx="10911535" cy="310896"/>
+          </a:xfrm>
+          <a:prstGeom prst="rect">
+            <a:avLst/>
+          </a:prstGeom>
+          <a:noFill/>
+        </p:spPr>
+        <p:txBody>
+          <a:bodyPr wrap="square">
+            <a:spAutoFit/>
+          </a:bodyPr>
+          <a:lstStyle/>
+          <a:p>
+            <a:pPr algn="ctr"/>
+            <a:r>
+              <a:rPr sz="2000" b="0" i="0">
+                <a:solidFill>
+                  <a:srgbClr val="828282"/>
+                </a:solidFill>
+                <a:latin typeface="Arial"/>
+              </a:rPr>
+              <a:t>なんと栄光の方法か</a:t>
+            </a:r>
+          </a:p>
+        </p:txBody>
+      </p:sp>
+      <p:sp>
+        <p:nvSpPr>
+          <p:cNvPr id="5" name="TextBox 4"/>
+          <p:cNvSpPr txBox="1"/>
+          <p:nvPr/>
+        </p:nvSpPr>
+        <p:spPr>
+          <a:xfrm>
+            <a:off x="640080" y="4494276"/>
+            <a:ext cx="10911535" cy="310896"/>
+          </a:xfrm>
+          <a:prstGeom prst="rect">
+            <a:avLst/>
+          </a:prstGeom>
+          <a:noFill/>
+        </p:spPr>
+        <p:txBody>
+          <a:bodyPr wrap="square">
+            <a:spAutoFit/>
+          </a:bodyPr>
+          <a:lstStyle/>
+          <a:p>
+            <a:pPr algn="ctr"/>
+            <a:r>
+              <a:rPr sz="2000" b="0" i="0">
+                <a:solidFill>
+                  <a:srgbClr val="828282"/>
+                </a:solidFill>
+                <a:latin typeface="Arial"/>
+              </a:rPr>
+              <a:t>あなたが私を救ってくれたように</a:t>
+            </a:r>
+          </a:p>
+        </p:txBody>
+      </p:sp>
     </p:spTree>
   </p:cSld>
   <p:clrMapOvr>
@@ -4074,6 +4704,76 @@
           </a:p>
         </p:txBody>
       </p:sp>
+      <p:sp>
+        <p:nvSpPr>
+          <p:cNvPr id="4" name="TextBox 3"/>
+          <p:cNvSpPr txBox="1"/>
+          <p:nvPr/>
+        </p:nvSpPr>
+        <p:spPr>
+          <a:xfrm>
+            <a:off x="640080" y="4128516"/>
+            <a:ext cx="10911535" cy="310896"/>
+          </a:xfrm>
+          <a:prstGeom prst="rect">
+            <a:avLst/>
+          </a:prstGeom>
+          <a:noFill/>
+        </p:spPr>
+        <p:txBody>
+          <a:bodyPr wrap="square">
+            <a:spAutoFit/>
+          </a:bodyPr>
+          <a:lstStyle/>
+          <a:p>
+            <a:pPr algn="ctr"/>
+            <a:r>
+              <a:rPr sz="2000" b="0" i="0">
+                <a:solidFill>
+                  <a:srgbClr val="828282"/>
+                </a:solidFill>
+                <a:latin typeface="Arial"/>
+              </a:rPr>
+              <a:t>おお、なんと栄光の日か</a:t>
+            </a:r>
+          </a:p>
+        </p:txBody>
+      </p:sp>
+      <p:sp>
+        <p:nvSpPr>
+          <p:cNvPr id="5" name="TextBox 4"/>
+          <p:cNvSpPr txBox="1"/>
+          <p:nvPr/>
+        </p:nvSpPr>
+        <p:spPr>
+          <a:xfrm>
+            <a:off x="640080" y="4494276"/>
+            <a:ext cx="10911535" cy="310896"/>
+          </a:xfrm>
+          <a:prstGeom prst="rect">
+            <a:avLst/>
+          </a:prstGeom>
+          <a:noFill/>
+        </p:spPr>
+        <p:txBody>
+          <a:bodyPr wrap="square">
+            <a:spAutoFit/>
+          </a:bodyPr>
+          <a:lstStyle/>
+          <a:p>
+            <a:pPr algn="ctr"/>
+            <a:r>
+              <a:rPr sz="2000" b="0" i="0">
+                <a:solidFill>
+                  <a:srgbClr val="828282"/>
+                </a:solidFill>
+                <a:latin typeface="Arial"/>
+              </a:rPr>
+              <a:t>なんと栄光に満ちた名前か</a:t>
+            </a:r>
+          </a:p>
+        </p:txBody>
+      </p:sp>
     </p:spTree>
   </p:cSld>
   <p:clrMapOvr>
@@ -4170,6 +4870,76 @@
           </a:p>
         </p:txBody>
       </p:sp>
+      <p:sp>
+        <p:nvSpPr>
+          <p:cNvPr id="4" name="TextBox 3"/>
+          <p:cNvSpPr txBox="1"/>
+          <p:nvPr/>
+        </p:nvSpPr>
+        <p:spPr>
+          <a:xfrm>
+            <a:off x="640080" y="4128516"/>
+            <a:ext cx="10911535" cy="310896"/>
+          </a:xfrm>
+          <a:prstGeom prst="rect">
+            <a:avLst/>
+          </a:prstGeom>
+          <a:noFill/>
+        </p:spPr>
+        <p:txBody>
+          <a:bodyPr wrap="square">
+            <a:spAutoFit/>
+          </a:bodyPr>
+          <a:lstStyle/>
+          <a:p>
+            <a:pPr algn="ctr"/>
+            <a:r>
+              <a:rPr sz="2000" b="0" i="0">
+                <a:solidFill>
+                  <a:srgbClr val="828282"/>
+                </a:solidFill>
+                <a:latin typeface="Arial"/>
+              </a:rPr>
+              <a:t>あなたは私を救ってくれた</a:t>
+            </a:r>
+          </a:p>
+        </p:txBody>
+      </p:sp>
+      <p:sp>
+        <p:nvSpPr>
+          <p:cNvPr id="5" name="TextBox 4"/>
+          <p:cNvSpPr txBox="1"/>
+          <p:nvPr/>
+        </p:nvSpPr>
+        <p:spPr>
+          <a:xfrm>
+            <a:off x="640080" y="4494276"/>
+            <a:ext cx="10911535" cy="310896"/>
+          </a:xfrm>
+          <a:prstGeom prst="rect">
+            <a:avLst/>
+          </a:prstGeom>
+          <a:noFill/>
+        </p:spPr>
+        <p:txBody>
+          <a:bodyPr wrap="square">
+            <a:spAutoFit/>
+          </a:bodyPr>
+          <a:lstStyle/>
+          <a:p>
+            <a:pPr algn="ctr"/>
+            <a:r>
+              <a:rPr sz="2000" b="0" i="0">
+                <a:solidFill>
+                  <a:srgbClr val="828282"/>
+                </a:solidFill>
+                <a:latin typeface="Arial"/>
+              </a:rPr>
+              <a:t>歌え：イエスは生きている</a:t>
+            </a:r>
+          </a:p>
+        </p:txBody>
+      </p:sp>
     </p:spTree>
   </p:cSld>
   <p:clrMapOvr>
@@ -4266,6 +5036,76 @@
           </a:p>
         </p:txBody>
       </p:sp>
+      <p:sp>
+        <p:nvSpPr>
+          <p:cNvPr id="4" name="TextBox 3"/>
+          <p:cNvSpPr txBox="1"/>
+          <p:nvPr/>
+        </p:nvSpPr>
+        <p:spPr>
+          <a:xfrm>
+            <a:off x="640080" y="4128516"/>
+            <a:ext cx="10911535" cy="310896"/>
+          </a:xfrm>
+          <a:prstGeom prst="rect">
+            <a:avLst/>
+          </a:prstGeom>
+          <a:noFill/>
+        </p:spPr>
+        <p:txBody>
+          <a:bodyPr wrap="square">
+            <a:spAutoFit/>
+          </a:bodyPr>
+          <a:lstStyle/>
+          <a:p>
+            <a:pPr algn="ctr"/>
+            <a:r>
+              <a:rPr sz="2000" b="0" i="0">
+                <a:solidFill>
+                  <a:srgbClr val="828282"/>
+                </a:solidFill>
+                <a:latin typeface="Arial"/>
+              </a:rPr>
+              <a:t>空の十字架、空の墓</a:t>
+            </a:r>
+          </a:p>
+        </p:txBody>
+      </p:sp>
+      <p:sp>
+        <p:nvSpPr>
+          <p:cNvPr id="5" name="TextBox 4"/>
+          <p:cNvSpPr txBox="1"/>
+          <p:nvPr/>
+        </p:nvSpPr>
+        <p:spPr>
+          <a:xfrm>
+            <a:off x="640080" y="4494276"/>
+            <a:ext cx="10911535" cy="310896"/>
+          </a:xfrm>
+          <a:prstGeom prst="rect">
+            <a:avLst/>
+          </a:prstGeom>
+          <a:noFill/>
+        </p:spPr>
+        <p:txBody>
+          <a:bodyPr wrap="square">
+            <a:spAutoFit/>
+          </a:bodyPr>
+          <a:lstStyle/>
+          <a:p>
+            <a:pPr algn="ctr"/>
+            <a:r>
+              <a:rPr sz="2000" b="0" i="0">
+                <a:solidFill>
+                  <a:srgbClr val="828282"/>
+                </a:solidFill>
+                <a:latin typeface="Arial"/>
+              </a:rPr>
+              <a:t>永遠のいのち、あなたはその日に勝ち取った</a:t>
+            </a:r>
+          </a:p>
+        </p:txBody>
+      </p:sp>
     </p:spTree>
   </p:cSld>
   <p:clrMapOvr>
@@ -4362,6 +5202,76 @@
           </a:p>
         </p:txBody>
       </p:sp>
+      <p:sp>
+        <p:nvSpPr>
+          <p:cNvPr id="4" name="TextBox 3"/>
+          <p:cNvSpPr txBox="1"/>
+          <p:nvPr/>
+        </p:nvSpPr>
+        <p:spPr>
+          <a:xfrm>
+            <a:off x="640080" y="4128516"/>
+            <a:ext cx="10911535" cy="310896"/>
+          </a:xfrm>
+          <a:prstGeom prst="rect">
+            <a:avLst/>
+          </a:prstGeom>
+          <a:noFill/>
+        </p:spPr>
+        <p:txBody>
+          <a:bodyPr wrap="square">
+            <a:spAutoFit/>
+          </a:bodyPr>
+          <a:lstStyle/>
+          <a:p>
+            <a:pPr algn="ctr"/>
+            <a:r>
+              <a:rPr sz="2000" b="0" i="0">
+                <a:solidFill>
+                  <a:srgbClr val="828282"/>
+                </a:solidFill>
+                <a:latin typeface="Arial"/>
+              </a:rPr>
+              <a:t>叫べ：イエスは生きている</a:t>
+            </a:r>
+          </a:p>
+        </p:txBody>
+      </p:sp>
+      <p:sp>
+        <p:nvSpPr>
+          <p:cNvPr id="5" name="TextBox 4"/>
+          <p:cNvSpPr txBox="1"/>
+          <p:nvPr/>
+        </p:nvSpPr>
+        <p:spPr>
+          <a:xfrm>
+            <a:off x="640080" y="4494276"/>
+            <a:ext cx="10911535" cy="310896"/>
+          </a:xfrm>
+          <a:prstGeom prst="rect">
+            <a:avLst/>
+          </a:prstGeom>
+          <a:noFill/>
+        </p:spPr>
+        <p:txBody>
+          <a:bodyPr wrap="square">
+            <a:spAutoFit/>
+          </a:bodyPr>
+          <a:lstStyle/>
+          <a:p>
+            <a:pPr algn="ctr"/>
+            <a:r>
+              <a:rPr sz="2000" b="0" i="0">
+                <a:solidFill>
+                  <a:srgbClr val="828282"/>
+                </a:solidFill>
+                <a:latin typeface="Arial"/>
+              </a:rPr>
+              <a:t>彼は生きている</a:t>
+            </a:r>
+          </a:p>
+        </p:txBody>
+      </p:sp>
     </p:spTree>
   </p:cSld>
   <p:clrMapOvr>
@@ -4458,6 +5368,76 @@
           </a:p>
         </p:txBody>
       </p:sp>
+      <p:sp>
+        <p:nvSpPr>
+          <p:cNvPr id="4" name="TextBox 3"/>
+          <p:cNvSpPr txBox="1"/>
+          <p:nvPr/>
+        </p:nvSpPr>
+        <p:spPr>
+          <a:xfrm>
+            <a:off x="640080" y="4128516"/>
+            <a:ext cx="10911535" cy="310896"/>
+          </a:xfrm>
+          <a:prstGeom prst="rect">
+            <a:avLst/>
+          </a:prstGeom>
+          <a:noFill/>
+        </p:spPr>
+        <p:txBody>
+          <a:bodyPr wrap="square">
+            <a:spAutoFit/>
+          </a:bodyPr>
+          <a:lstStyle/>
+          <a:p>
+            <a:pPr algn="ctr"/>
+            <a:r>
+              <a:rPr sz="2000" b="0" i="0">
+                <a:solidFill>
+                  <a:srgbClr val="828282"/>
+                </a:solidFill>
+                <a:latin typeface="Arial"/>
+              </a:rPr>
+              <a:t>おお幸いな日よ、幸いな日よ</a:t>
+            </a:r>
+          </a:p>
+        </p:txBody>
+      </p:sp>
+      <p:sp>
+        <p:nvSpPr>
+          <p:cNvPr id="5" name="TextBox 4"/>
+          <p:cNvSpPr txBox="1"/>
+          <p:nvPr/>
+        </p:nvSpPr>
+        <p:spPr>
+          <a:xfrm>
+            <a:off x="640080" y="4494276"/>
+            <a:ext cx="10911535" cy="310896"/>
+          </a:xfrm>
+          <a:prstGeom prst="rect">
+            <a:avLst/>
+          </a:prstGeom>
+          <a:noFill/>
+        </p:spPr>
+        <p:txBody>
+          <a:bodyPr wrap="square">
+            <a:spAutoFit/>
+          </a:bodyPr>
+          <a:lstStyle/>
+          <a:p>
+            <a:pPr algn="ctr"/>
+            <a:r>
+              <a:rPr sz="2000" b="0" i="0">
+                <a:solidFill>
+                  <a:srgbClr val="828282"/>
+                </a:solidFill>
+                <a:latin typeface="Arial"/>
+              </a:rPr>
+              <a:t>あなたは私の罪を洗い流した</a:t>
+            </a:r>
+          </a:p>
+        </p:txBody>
+      </p:sp>
     </p:spTree>
   </p:cSld>
   <p:clrMapOvr>
@@ -4554,6 +5534,76 @@
           </a:p>
         </p:txBody>
       </p:sp>
+      <p:sp>
+        <p:nvSpPr>
+          <p:cNvPr id="4" name="TextBox 3"/>
+          <p:cNvSpPr txBox="1"/>
+          <p:nvPr/>
+        </p:nvSpPr>
+        <p:spPr>
+          <a:xfrm>
+            <a:off x="640080" y="4128516"/>
+            <a:ext cx="10911535" cy="310896"/>
+          </a:xfrm>
+          <a:prstGeom prst="rect">
+            <a:avLst/>
+          </a:prstGeom>
+          <a:noFill/>
+        </p:spPr>
+        <p:txBody>
+          <a:bodyPr wrap="square">
+            <a:spAutoFit/>
+          </a:bodyPr>
+          <a:lstStyle/>
+          <a:p>
+            <a:pPr algn="ctr"/>
+            <a:r>
+              <a:rPr sz="2000" b="0" i="0">
+                <a:solidFill>
+                  <a:srgbClr val="828282"/>
+                </a:solidFill>
+                <a:latin typeface="Arial"/>
+              </a:rPr>
+              <a:t>おお幸いな日よ、幸いな日よ</a:t>
+            </a:r>
+          </a:p>
+        </p:txBody>
+      </p:sp>
+      <p:sp>
+        <p:nvSpPr>
+          <p:cNvPr id="5" name="TextBox 4"/>
+          <p:cNvSpPr txBox="1"/>
+          <p:nvPr/>
+        </p:nvSpPr>
+        <p:spPr>
+          <a:xfrm>
+            <a:off x="640080" y="4494276"/>
+            <a:ext cx="10911535" cy="310896"/>
+          </a:xfrm>
+          <a:prstGeom prst="rect">
+            <a:avLst/>
+          </a:prstGeom>
+          <a:noFill/>
+        </p:spPr>
+        <p:txBody>
+          <a:bodyPr wrap="square">
+            <a:spAutoFit/>
+          </a:bodyPr>
+          <a:lstStyle/>
+          <a:p>
+            <a:pPr algn="ctr"/>
+            <a:r>
+              <a:rPr sz="2000" b="0" i="0">
+                <a:solidFill>
+                  <a:srgbClr val="828282"/>
+                </a:solidFill>
+                <a:latin typeface="Arial"/>
+              </a:rPr>
+              <a:t>永遠に私は変えられた</a:t>
+            </a:r>
+          </a:p>
+        </p:txBody>
+      </p:sp>
     </p:spTree>
   </p:cSld>
   <p:clrMapOvr>
@@ -4611,6 +5661,41 @@
                 <a:latin typeface="Arial"/>
               </a:rPr>
               <a:t>Quando eu estiver naquele lugar</a:t>
+            </a:r>
+          </a:p>
+        </p:txBody>
+      </p:sp>
+      <p:sp>
+        <p:nvSpPr>
+          <p:cNvPr id="3" name="TextBox 2"/>
+          <p:cNvSpPr txBox="1"/>
+          <p:nvPr/>
+        </p:nvSpPr>
+        <p:spPr>
+          <a:xfrm>
+            <a:off x="640080" y="3845052"/>
+            <a:ext cx="10911535" cy="310896"/>
+          </a:xfrm>
+          <a:prstGeom prst="rect">
+            <a:avLst/>
+          </a:prstGeom>
+          <a:noFill/>
+        </p:spPr>
+        <p:txBody>
+          <a:bodyPr wrap="square">
+            <a:spAutoFit/>
+          </a:bodyPr>
+          <a:lstStyle/>
+          <a:p>
+            <a:pPr algn="ctr"/>
+            <a:r>
+              <a:rPr sz="2000" b="0" i="0">
+                <a:solidFill>
+                  <a:srgbClr val="828282"/>
+                </a:solidFill>
+                <a:latin typeface="Arial"/>
+              </a:rPr>
+              <a:t>私があの場所にいるとき</a:t>
             </a:r>
           </a:p>
         </p:txBody>
